--- a/docs/presentation.pptx
+++ b/docs/presentation.pptx
@@ -16,15 +16,29 @@
     <p:sldId id="264" r:id="rId11"/>
     <p:sldId id="265" r:id="rId12"/>
     <p:sldId id="266" r:id="rId13"/>
-    <p:sldId id="267" r:id="rId14"/>
-    <p:sldId id="268" r:id="rId15"/>
-    <p:sldId id="269" r:id="rId16"/>
-    <p:sldId id="270" r:id="rId17"/>
-    <p:sldId id="271" r:id="rId18"/>
-    <p:sldId id="272" r:id="rId19"/>
-    <p:sldId id="273" r:id="rId20"/>
-    <p:sldId id="274" r:id="rId21"/>
-    <p:sldId id="275" r:id="rId22"/>
+    <p:sldId id="277" r:id="rId14"/>
+    <p:sldId id="278" r:id="rId15"/>
+    <p:sldId id="267" r:id="rId16"/>
+    <p:sldId id="268" r:id="rId17"/>
+    <p:sldId id="279" r:id="rId18"/>
+    <p:sldId id="269" r:id="rId19"/>
+    <p:sldId id="290" r:id="rId20"/>
+    <p:sldId id="291" r:id="rId21"/>
+    <p:sldId id="281" r:id="rId22"/>
+    <p:sldId id="282" r:id="rId23"/>
+    <p:sldId id="283" r:id="rId24"/>
+    <p:sldId id="284" r:id="rId25"/>
+    <p:sldId id="285" r:id="rId26"/>
+    <p:sldId id="286" r:id="rId27"/>
+    <p:sldId id="287" r:id="rId28"/>
+    <p:sldId id="288" r:id="rId29"/>
+    <p:sldId id="270" r:id="rId30"/>
+    <p:sldId id="271" r:id="rId31"/>
+    <p:sldId id="272" r:id="rId32"/>
+    <p:sldId id="273" r:id="rId33"/>
+    <p:sldId id="274" r:id="rId34"/>
+    <p:sldId id="275" r:id="rId35"/>
+    <p:sldId id="280" r:id="rId36"/>
   </p:sldIdLst>
   <p:sldSz cx="12192000" cy="6858000"/>
   <p:notesSz cx="6858000" cy="9144000"/>
@@ -3453,7 +3467,7 @@
               <a:buNone/>
             </a:pPr>
             <a:r>
-              <a:rPr lang="en-US" altLang="en-GB">
+              <a:rPr lang="en-US" altLang="en-GB" b="1">
                 <a:latin typeface="Times New Roman" panose="02020603050405020304" charset="0"/>
                 <a:cs typeface="Times New Roman" panose="02020603050405020304" charset="0"/>
               </a:rPr>
@@ -3466,7 +3480,7 @@
               </a:rPr>
               <a:t>Resume Parser Agent</a:t>
             </a:r>
-            <a:endParaRPr lang="en-US" altLang="en-GB">
+            <a:endParaRPr lang="en-US" altLang="en-GB" b="1">
               <a:latin typeface="Times New Roman" panose="02020603050405020304" charset="0"/>
               <a:cs typeface="Times New Roman" panose="02020603050405020304" charset="0"/>
             </a:endParaRPr>
@@ -3476,11 +3490,31 @@
               <a:buNone/>
             </a:pPr>
             <a:r>
-              <a:rPr lang="en-US" altLang="en-GB">
-                <a:latin typeface="Times New Roman" panose="02020603050405020304" charset="0"/>
-                <a:cs typeface="Times New Roman" panose="02020603050405020304" charset="0"/>
-              </a:rPr>
-              <a:t>Extracts skills, experience, and roles from resume</a:t>
+              <a:rPr lang="en-US" altLang="en-GB" b="1">
+                <a:latin typeface="Times New Roman" panose="02020603050405020304" charset="0"/>
+                <a:cs typeface="Times New Roman" panose="02020603050405020304" charset="0"/>
+              </a:rPr>
+              <a:t>Role</a:t>
+            </a:r>
+            <a:r>
+              <a:rPr lang="en-US" altLang="en-GB">
+                <a:latin typeface="Times New Roman" panose="02020603050405020304" charset="0"/>
+                <a:cs typeface="Times New Roman" panose="02020603050405020304" charset="0"/>
+              </a:rPr>
+              <a:t>:</a:t>
+            </a:r>
+            <a:endParaRPr lang="en-US" altLang="en-GB">
+              <a:latin typeface="Times New Roman" panose="02020603050405020304" charset="0"/>
+              <a:cs typeface="Times New Roman" panose="02020603050405020304" charset="0"/>
+            </a:endParaRPr>
+          </a:p>
+          <a:p>
+            <a:r>
+              <a:rPr lang="en-US" altLang="en-GB">
+                <a:latin typeface="Times New Roman" panose="02020603050405020304" charset="0"/>
+                <a:cs typeface="Times New Roman" panose="02020603050405020304" charset="0"/>
+              </a:rPr>
+              <a:t>Extract structured data from resume</a:t>
             </a:r>
             <a:endParaRPr lang="en-US" altLang="en-GB">
               <a:latin typeface="Times New Roman" panose="02020603050405020304" charset="0"/>
@@ -3492,82 +3526,11 @@
               <a:buNone/>
             </a:pPr>
             <a:r>
-              <a:rPr lang="en-US" altLang="en-GB">
-                <a:latin typeface="Times New Roman" panose="02020603050405020304" charset="0"/>
-                <a:cs typeface="Times New Roman" panose="02020603050405020304" charset="0"/>
-              </a:rPr>
-              <a:t>Outputs structured Profile JSON</a:t>
-            </a:r>
-            <a:endParaRPr lang="en-US" altLang="en-GB">
-              <a:latin typeface="Times New Roman" panose="02020603050405020304" charset="0"/>
-              <a:cs typeface="Times New Roman" panose="02020603050405020304" charset="0"/>
-            </a:endParaRPr>
-          </a:p>
-          <a:p>
-            <a:pPr marL="0" indent="0">
-              <a:buNone/>
-            </a:pPr>
-            <a:r>
-              <a:rPr lang="en-US" altLang="en-GB">
-                <a:latin typeface="Times New Roman" panose="02020603050405020304" charset="0"/>
-                <a:cs typeface="Times New Roman" panose="02020603050405020304" charset="0"/>
-              </a:rPr>
-              <a:t>2. </a:t>
-            </a:r>
-            <a:r>
               <a:rPr lang="en-US" altLang="en-GB" b="1">
                 <a:latin typeface="Times New Roman" panose="02020603050405020304" charset="0"/>
                 <a:cs typeface="Times New Roman" panose="02020603050405020304" charset="0"/>
               </a:rPr>
-              <a:t>Matcher Agents</a:t>
-            </a:r>
-            <a:endParaRPr lang="en-US" altLang="en-GB">
-              <a:latin typeface="Times New Roman" panose="02020603050405020304" charset="0"/>
-              <a:cs typeface="Times New Roman" panose="02020603050405020304" charset="0"/>
-            </a:endParaRPr>
-          </a:p>
-          <a:p>
-            <a:pPr marL="457200" lvl="1" indent="0">
-              <a:buNone/>
-            </a:pPr>
-            <a:r>
-              <a:rPr lang="en-US" altLang="en-GB">
-                <a:latin typeface="Times New Roman" panose="02020603050405020304" charset="0"/>
-                <a:cs typeface="Times New Roman" panose="02020603050405020304" charset="0"/>
-              </a:rPr>
-              <a:t>Remotive Matcher</a:t>
-            </a:r>
-            <a:endParaRPr lang="en-US" altLang="en-GB">
-              <a:latin typeface="Times New Roman" panose="02020603050405020304" charset="0"/>
-              <a:cs typeface="Times New Roman" panose="02020603050405020304" charset="0"/>
-            </a:endParaRPr>
-          </a:p>
-          <a:p>
-            <a:pPr marL="457200" lvl="1" indent="0">
-              <a:buNone/>
-            </a:pPr>
-            <a:r>
-              <a:rPr lang="en-US" altLang="en-GB">
-                <a:latin typeface="Times New Roman" panose="02020603050405020304" charset="0"/>
-                <a:cs typeface="Times New Roman" panose="02020603050405020304" charset="0"/>
-              </a:rPr>
-              <a:t>Arbeitnow Matcher</a:t>
-            </a:r>
-            <a:endParaRPr lang="en-US" altLang="en-GB">
-              <a:latin typeface="Times New Roman" panose="02020603050405020304" charset="0"/>
-              <a:cs typeface="Times New Roman" panose="02020603050405020304" charset="0"/>
-            </a:endParaRPr>
-          </a:p>
-          <a:p>
-            <a:pPr marL="457200" lvl="1" indent="0">
-              <a:buNone/>
-            </a:pPr>
-            <a:r>
-              <a:rPr lang="en-US" altLang="en-GB" b="1">
-                <a:latin typeface="Times New Roman" panose="02020603050405020304" charset="0"/>
-                <a:cs typeface="Times New Roman" panose="02020603050405020304" charset="0"/>
-              </a:rPr>
-              <a:t>Function</a:t>
+              <a:t>Output</a:t>
             </a:r>
             <a:r>
               <a:rPr lang="en-US" altLang="en-GB">
@@ -3582,31 +3545,68 @@
             </a:endParaRPr>
           </a:p>
           <a:p>
-            <a:pPr marL="457200" lvl="1" indent="0">
-              <a:buNone/>
-            </a:pPr>
-            <a:r>
-              <a:rPr lang="en-US" altLang="en-GB">
-                <a:latin typeface="Times New Roman" panose="02020603050405020304" charset="0"/>
-                <a:cs typeface="Times New Roman" panose="02020603050405020304" charset="0"/>
-              </a:rPr>
-              <a:t>Fetch jobs from APIs</a:t>
-            </a:r>
-            <a:endParaRPr lang="en-US" altLang="en-GB">
-              <a:latin typeface="Times New Roman" panose="02020603050405020304" charset="0"/>
-              <a:cs typeface="Times New Roman" panose="02020603050405020304" charset="0"/>
-            </a:endParaRPr>
-          </a:p>
-          <a:p>
-            <a:pPr marL="457200" lvl="1" indent="0">
-              <a:buNone/>
-            </a:pPr>
-            <a:r>
-              <a:rPr lang="en-US" altLang="en-GB">
-                <a:latin typeface="Times New Roman" panose="02020603050405020304" charset="0"/>
-                <a:cs typeface="Times New Roman" panose="02020603050405020304" charset="0"/>
-              </a:rPr>
-              <a:t>Filter jobs based on user profile</a:t>
+            <a:r>
+              <a:rPr lang="en-US" altLang="en-GB">
+                <a:latin typeface="Times New Roman" panose="02020603050405020304" charset="0"/>
+                <a:cs typeface="Times New Roman" panose="02020603050405020304" charset="0"/>
+              </a:rPr>
+              <a:t>Profile JSON:</a:t>
+            </a:r>
+            <a:endParaRPr lang="en-US" altLang="en-GB">
+              <a:latin typeface="Times New Roman" panose="02020603050405020304" charset="0"/>
+              <a:cs typeface="Times New Roman" panose="02020603050405020304" charset="0"/>
+            </a:endParaRPr>
+          </a:p>
+          <a:p>
+            <a:pPr lvl="1"/>
+            <a:r>
+              <a:rPr lang="en-US" altLang="en-GB">
+                <a:latin typeface="Times New Roman" panose="02020603050405020304" charset="0"/>
+                <a:cs typeface="Times New Roman" panose="02020603050405020304" charset="0"/>
+              </a:rPr>
+              <a:t>Skills</a:t>
+            </a:r>
+            <a:endParaRPr lang="en-US" altLang="en-GB">
+              <a:latin typeface="Times New Roman" panose="02020603050405020304" charset="0"/>
+              <a:cs typeface="Times New Roman" panose="02020603050405020304" charset="0"/>
+            </a:endParaRPr>
+          </a:p>
+          <a:p>
+            <a:pPr lvl="1"/>
+            <a:r>
+              <a:rPr lang="en-US" altLang="en-GB">
+                <a:latin typeface="Times New Roman" panose="02020603050405020304" charset="0"/>
+                <a:cs typeface="Times New Roman" panose="02020603050405020304" charset="0"/>
+              </a:rPr>
+              <a:t>Experience</a:t>
+            </a:r>
+            <a:endParaRPr lang="en-US" altLang="en-GB">
+              <a:latin typeface="Times New Roman" panose="02020603050405020304" charset="0"/>
+              <a:cs typeface="Times New Roman" panose="02020603050405020304" charset="0"/>
+            </a:endParaRPr>
+          </a:p>
+          <a:p>
+            <a:pPr lvl="1"/>
+            <a:r>
+              <a:rPr lang="en-US" altLang="en-GB">
+                <a:latin typeface="Times New Roman" panose="02020603050405020304" charset="0"/>
+                <a:cs typeface="Times New Roman" panose="02020603050405020304" charset="0"/>
+              </a:rPr>
+              <a:t>Projects</a:t>
+            </a:r>
+            <a:endParaRPr lang="en-US" altLang="en-GB">
+              <a:latin typeface="Times New Roman" panose="02020603050405020304" charset="0"/>
+              <a:cs typeface="Times New Roman" panose="02020603050405020304" charset="0"/>
+            </a:endParaRPr>
+          </a:p>
+          <a:p>
+            <a:pPr lvl="1"/>
+            <a:r>
+              <a:rPr lang="en-US" altLang="en-GB">
+                <a:latin typeface="Times New Roman" panose="02020603050405020304" charset="0"/>
+                <a:cs typeface="Times New Roman" panose="02020603050405020304" charset="0"/>
+              </a:rPr>
+              <a:t>Education etc</a:t>
             </a:r>
             <a:endParaRPr lang="en-US" altLang="en-GB">
               <a:latin typeface="Times New Roman" panose="02020603050405020304" charset="0"/>
@@ -3677,86 +3677,73 @@
               <a:buNone/>
             </a:pPr>
             <a:r>
-              <a:rPr lang="en-US" altLang="en-GB">
-                <a:latin typeface="Times New Roman" panose="02020603050405020304" charset="0"/>
-                <a:cs typeface="Times New Roman" panose="02020603050405020304" charset="0"/>
-              </a:rPr>
-              <a:t>3. </a:t>
-            </a:r>
-            <a:r>
               <a:rPr lang="en-US" altLang="en-GB" b="1">
                 <a:latin typeface="Times New Roman" panose="02020603050405020304" charset="0"/>
                 <a:cs typeface="Times New Roman" panose="02020603050405020304" charset="0"/>
               </a:rPr>
-              <a:t>Ranking Agent</a:t>
-            </a:r>
-            <a:endParaRPr lang="en-US" altLang="en-GB">
-              <a:latin typeface="Times New Roman" panose="02020603050405020304" charset="0"/>
-              <a:cs typeface="Times New Roman" panose="02020603050405020304" charset="0"/>
-            </a:endParaRPr>
-          </a:p>
-          <a:p>
-            <a:pPr>
-              <a:buFont typeface="Arial" panose="020B0604020202020204" pitchFamily="34" charset="0"/>
-              <a:buChar char="•"/>
+              <a:t>2. Remotive Matcher Agent</a:t>
+            </a:r>
+            <a:endParaRPr lang="en-US" altLang="en-GB" b="1">
+              <a:latin typeface="Times New Roman" panose="02020603050405020304" charset="0"/>
+              <a:cs typeface="Times New Roman" panose="02020603050405020304" charset="0"/>
+            </a:endParaRPr>
+          </a:p>
+          <a:p>
+            <a:pPr marL="0" indent="0">
+              <a:buNone/>
             </a:pPr>
             <a:r>
-              <a:rPr lang="en-US" altLang="en-GB">
-                <a:latin typeface="Times New Roman" panose="02020603050405020304" charset="0"/>
-                <a:cs typeface="Times New Roman" panose="02020603050405020304" charset="0"/>
-              </a:rPr>
-              <a:t>Assigns a relevance score to each job</a:t>
-            </a:r>
-            <a:endParaRPr lang="en-US" altLang="en-GB">
-              <a:latin typeface="Times New Roman" panose="02020603050405020304" charset="0"/>
-              <a:cs typeface="Times New Roman" panose="02020603050405020304" charset="0"/>
-            </a:endParaRPr>
-          </a:p>
-          <a:p>
-            <a:pPr>
-              <a:buFont typeface="Arial" panose="020B0604020202020204" pitchFamily="34" charset="0"/>
-              <a:buChar char="•"/>
-            </a:pPr>
-            <a:r>
-              <a:rPr lang="en-US" altLang="en-GB">
-                <a:latin typeface="Times New Roman" panose="02020603050405020304" charset="0"/>
-                <a:cs typeface="Times New Roman" panose="02020603050405020304" charset="0"/>
-              </a:rPr>
-              <a:t>Uses:</a:t>
-            </a:r>
-            <a:endParaRPr lang="en-US" altLang="en-GB">
-              <a:latin typeface="Times New Roman" panose="02020603050405020304" charset="0"/>
-              <a:cs typeface="Times New Roman" panose="02020603050405020304" charset="0"/>
-            </a:endParaRPr>
-          </a:p>
-          <a:p>
-            <a:pPr lvl="1">
-              <a:buFont typeface="Arial" panose="020B0604020202020204" pitchFamily="34" charset="0"/>
-              <a:buChar char="•"/>
-            </a:pPr>
-            <a:r>
-              <a:rPr lang="en-US" altLang="en-GB">
-                <a:latin typeface="Times New Roman" panose="02020603050405020304" charset="0"/>
-                <a:cs typeface="Times New Roman" panose="02020603050405020304" charset="0"/>
-              </a:rPr>
-              <a:t>Skill matching</a:t>
-            </a:r>
-            <a:endParaRPr lang="en-US" altLang="en-GB">
-              <a:latin typeface="Times New Roman" panose="02020603050405020304" charset="0"/>
-              <a:cs typeface="Times New Roman" panose="02020603050405020304" charset="0"/>
-            </a:endParaRPr>
-          </a:p>
-          <a:p>
-            <a:pPr lvl="1">
-              <a:buFont typeface="Arial" panose="020B0604020202020204" pitchFamily="34" charset="0"/>
-              <a:buChar char="•"/>
-            </a:pPr>
-            <a:r>
-              <a:rPr lang="en-US" altLang="en-GB">
-                <a:latin typeface="Times New Roman" panose="02020603050405020304" charset="0"/>
-                <a:cs typeface="Times New Roman" panose="02020603050405020304" charset="0"/>
-              </a:rPr>
-              <a:t>Keyword similarity</a:t>
+              <a:rPr lang="en-US" altLang="en-GB" b="1">
+                <a:latin typeface="Times New Roman" panose="02020603050405020304" charset="0"/>
+                <a:cs typeface="Times New Roman" panose="02020603050405020304" charset="0"/>
+              </a:rPr>
+              <a:t>Role</a:t>
+            </a:r>
+            <a:r>
+              <a:rPr lang="en-US" altLang="en-GB">
+                <a:latin typeface="Times New Roman" panose="02020603050405020304" charset="0"/>
+                <a:cs typeface="Times New Roman" panose="02020603050405020304" charset="0"/>
+              </a:rPr>
+              <a:t>:</a:t>
+            </a:r>
+            <a:endParaRPr lang="en-US" altLang="en-GB">
+              <a:latin typeface="Times New Roman" panose="02020603050405020304" charset="0"/>
+              <a:cs typeface="Times New Roman" panose="02020603050405020304" charset="0"/>
+            </a:endParaRPr>
+          </a:p>
+          <a:p>
+            <a:r>
+              <a:rPr lang="en-US" altLang="en-GB">
+                <a:latin typeface="Times New Roman" panose="02020603050405020304" charset="0"/>
+                <a:cs typeface="Times New Roman" panose="02020603050405020304" charset="0"/>
+              </a:rPr>
+              <a:t>Fetch jobs using fetch_remotive_jobs()</a:t>
+            </a:r>
+            <a:endParaRPr lang="en-US" altLang="en-GB">
+              <a:latin typeface="Times New Roman" panose="02020603050405020304" charset="0"/>
+              <a:cs typeface="Times New Roman" panose="02020603050405020304" charset="0"/>
+            </a:endParaRPr>
+          </a:p>
+          <a:p>
+            <a:r>
+              <a:rPr lang="en-US" altLang="en-GB">
+                <a:latin typeface="Times New Roman" panose="02020603050405020304" charset="0"/>
+                <a:cs typeface="Times New Roman" panose="02020603050405020304" charset="0"/>
+              </a:rPr>
+              <a:t>Match jobs against user profile</a:t>
+            </a:r>
+            <a:endParaRPr lang="en-US" altLang="en-GB">
+              <a:latin typeface="Times New Roman" panose="02020603050405020304" charset="0"/>
+              <a:cs typeface="Times New Roman" panose="02020603050405020304" charset="0"/>
+            </a:endParaRPr>
+          </a:p>
+          <a:p>
+            <a:r>
+              <a:rPr lang="en-US" altLang="en-GB">
+                <a:latin typeface="Times New Roman" panose="02020603050405020304" charset="0"/>
+                <a:cs typeface="Times New Roman" panose="02020603050405020304" charset="0"/>
+              </a:rPr>
+              <a:t>Assign match scores</a:t>
             </a:r>
             <a:endParaRPr lang="en-US" altLang="en-GB">
               <a:latin typeface="Times New Roman" panose="02020603050405020304" charset="0"/>
@@ -3827,18 +3814,11 @@
               <a:buNone/>
             </a:pPr>
             <a:r>
-              <a:rPr lang="en-US" altLang="en-GB">
-                <a:latin typeface="Times New Roman" panose="02020603050405020304" charset="0"/>
-                <a:cs typeface="Times New Roman" panose="02020603050405020304" charset="0"/>
-              </a:rPr>
-              <a:t>4. </a:t>
-            </a:r>
-            <a:r>
               <a:rPr lang="en-US" altLang="en-GB" b="1">
                 <a:latin typeface="Times New Roman" panose="02020603050405020304" charset="0"/>
                 <a:cs typeface="Times New Roman" panose="02020603050405020304" charset="0"/>
               </a:rPr>
-              <a:t>Aggregator Agent</a:t>
+              <a:t>3. Arbeitnow Matcher Agent</a:t>
             </a:r>
             <a:endParaRPr lang="en-US" altLang="en-GB" b="1">
               <a:latin typeface="Times New Roman" panose="02020603050405020304" charset="0"/>
@@ -3846,51 +3826,61 @@
             </a:endParaRPr>
           </a:p>
           <a:p>
-            <a:r>
-              <a:rPr lang="en-US" altLang="en-GB">
-                <a:latin typeface="Times New Roman" panose="02020603050405020304" charset="0"/>
-                <a:cs typeface="Times New Roman" panose="02020603050405020304" charset="0"/>
-              </a:rPr>
-              <a:t>Combines results from all sources</a:t>
-            </a:r>
-            <a:endParaRPr lang="en-US" altLang="en-GB">
-              <a:latin typeface="Times New Roman" panose="02020603050405020304" charset="0"/>
-              <a:cs typeface="Times New Roman" panose="02020603050405020304" charset="0"/>
-            </a:endParaRPr>
-          </a:p>
-          <a:p>
-            <a:r>
-              <a:rPr lang="en-US" altLang="en-GB">
-                <a:latin typeface="Times New Roman" panose="02020603050405020304" charset="0"/>
-                <a:cs typeface="Times New Roman" panose="02020603050405020304" charset="0"/>
-              </a:rPr>
-              <a:t>Removes duplicate jobs</a:t>
-            </a:r>
-            <a:endParaRPr lang="en-US" altLang="en-GB">
-              <a:latin typeface="Times New Roman" panose="02020603050405020304" charset="0"/>
-              <a:cs typeface="Times New Roman" panose="02020603050405020304" charset="0"/>
-            </a:endParaRPr>
-          </a:p>
-          <a:p>
-            <a:r>
-              <a:rPr lang="en-US" altLang="en-GB">
-                <a:latin typeface="Times New Roman" panose="02020603050405020304" charset="0"/>
-                <a:cs typeface="Times New Roman" panose="02020603050405020304" charset="0"/>
-              </a:rPr>
-              <a:t>Sorts by highest score</a:t>
-            </a:r>
-            <a:endParaRPr lang="en-US" altLang="en-GB">
-              <a:latin typeface="Times New Roman" panose="02020603050405020304" charset="0"/>
-              <a:cs typeface="Times New Roman" panose="02020603050405020304" charset="0"/>
-            </a:endParaRPr>
-          </a:p>
-          <a:p>
-            <a:r>
-              <a:rPr lang="en-US" altLang="en-GB">
-                <a:latin typeface="Times New Roman" panose="02020603050405020304" charset="0"/>
-                <a:cs typeface="Times New Roman" panose="02020603050405020304" charset="0"/>
-              </a:rPr>
-              <a:t>Returns top matches</a:t>
+            <a:pPr marL="0" indent="0">
+              <a:buNone/>
+            </a:pPr>
+            <a:r>
+              <a:rPr lang="en-US" altLang="en-GB" b="1">
+                <a:latin typeface="Times New Roman" panose="02020603050405020304" charset="0"/>
+                <a:cs typeface="Times New Roman" panose="02020603050405020304" charset="0"/>
+              </a:rPr>
+              <a:t>Role</a:t>
+            </a:r>
+            <a:r>
+              <a:rPr lang="en-US" altLang="en-GB">
+                <a:latin typeface="Times New Roman" panose="02020603050405020304" charset="0"/>
+                <a:cs typeface="Times New Roman" panose="02020603050405020304" charset="0"/>
+              </a:rPr>
+              <a:t>:</a:t>
+            </a:r>
+            <a:endParaRPr lang="en-US" altLang="en-GB">
+              <a:latin typeface="Times New Roman" panose="02020603050405020304" charset="0"/>
+              <a:cs typeface="Times New Roman" panose="02020603050405020304" charset="0"/>
+            </a:endParaRPr>
+          </a:p>
+          <a:p>
+            <a:r>
+              <a:rPr lang="en-US" altLang="en-GB">
+                <a:latin typeface="Times New Roman" panose="02020603050405020304" charset="0"/>
+                <a:cs typeface="Times New Roman" panose="02020603050405020304" charset="0"/>
+              </a:rPr>
+              <a:t>Fetch jobs using fetch_arbeitnow_jobs()</a:t>
+            </a:r>
+            <a:endParaRPr lang="en-US" altLang="en-GB">
+              <a:latin typeface="Times New Roman" panose="02020603050405020304" charset="0"/>
+              <a:cs typeface="Times New Roman" panose="02020603050405020304" charset="0"/>
+            </a:endParaRPr>
+          </a:p>
+          <a:p>
+            <a:r>
+              <a:rPr lang="en-US" altLang="en-GB">
+                <a:latin typeface="Times New Roman" panose="02020603050405020304" charset="0"/>
+                <a:cs typeface="Times New Roman" panose="02020603050405020304" charset="0"/>
+              </a:rPr>
+              <a:t>Match jobs against user profile</a:t>
+            </a:r>
+            <a:endParaRPr lang="en-US" altLang="en-GB">
+              <a:latin typeface="Times New Roman" panose="02020603050405020304" charset="0"/>
+              <a:cs typeface="Times New Roman" panose="02020603050405020304" charset="0"/>
+            </a:endParaRPr>
+          </a:p>
+          <a:p>
+            <a:r>
+              <a:rPr lang="en-US" altLang="en-GB">
+                <a:latin typeface="Times New Roman" panose="02020603050405020304" charset="0"/>
+                <a:cs typeface="Times New Roman" panose="02020603050405020304" charset="0"/>
+              </a:rPr>
+              <a:t>Assign match scores</a:t>
             </a:r>
             <a:endParaRPr lang="en-US" altLang="en-GB">
               <a:latin typeface="Times New Roman" panose="02020603050405020304" charset="0"/>
@@ -3961,18 +3951,11 @@
               <a:buNone/>
             </a:pPr>
             <a:r>
-              <a:rPr lang="en-US" altLang="en-GB">
-                <a:latin typeface="Times New Roman" panose="02020603050405020304" charset="0"/>
-                <a:cs typeface="Times New Roman" panose="02020603050405020304" charset="0"/>
-              </a:rPr>
-              <a:t>5. </a:t>
-            </a:r>
-            <a:r>
               <a:rPr lang="en-US" altLang="en-GB" b="1">
                 <a:latin typeface="Times New Roman" panose="02020603050405020304" charset="0"/>
                 <a:cs typeface="Times New Roman" panose="02020603050405020304" charset="0"/>
               </a:rPr>
-              <a:t>Resume Generator Agent</a:t>
+              <a:t>Matcher Features</a:t>
             </a:r>
             <a:endParaRPr lang="en-US" altLang="en-GB" b="1">
               <a:latin typeface="Times New Roman" panose="02020603050405020304" charset="0"/>
@@ -3980,25 +3963,77 @@
             </a:endParaRPr>
           </a:p>
           <a:p>
-            <a:r>
-              <a:rPr lang="en-US" altLang="en-GB">
-                <a:latin typeface="Times New Roman" panose="02020603050405020304" charset="0"/>
-                <a:cs typeface="Times New Roman" panose="02020603050405020304" charset="0"/>
-              </a:rPr>
-              <a:t>Creates tailored resumes for specific jobs</a:t>
-            </a:r>
-            <a:endParaRPr lang="en-US" altLang="en-GB">
-              <a:latin typeface="Times New Roman" panose="02020603050405020304" charset="0"/>
-              <a:cs typeface="Times New Roman" panose="02020603050405020304" charset="0"/>
-            </a:endParaRPr>
-          </a:p>
-          <a:p>
-            <a:r>
-              <a:rPr lang="en-US" altLang="en-GB">
-                <a:latin typeface="Times New Roman" panose="02020603050405020304" charset="0"/>
-                <a:cs typeface="Times New Roman" panose="02020603050405020304" charset="0"/>
-              </a:rPr>
-              <a:t>Aligns resume content with job descriptions</a:t>
+            <a:pPr marL="0" indent="0">
+              <a:buNone/>
+            </a:pPr>
+            <a:endParaRPr lang="en-US" altLang="en-GB">
+              <a:latin typeface="Times New Roman" panose="02020603050405020304" charset="0"/>
+              <a:cs typeface="Times New Roman" panose="02020603050405020304" charset="0"/>
+            </a:endParaRPr>
+          </a:p>
+          <a:p>
+            <a:pPr marL="0" indent="0">
+              <a:buNone/>
+            </a:pPr>
+            <a:r>
+              <a:rPr lang="en-US" altLang="en-US">
+                <a:latin typeface="Times New Roman" panose="02020603050405020304" charset="0"/>
+                <a:cs typeface="Times New Roman" panose="02020603050405020304" charset="0"/>
+              </a:rPr>
+              <a:t>✔</a:t>
+            </a:r>
+            <a:r>
+              <a:rPr lang="en-US" altLang="en-GB">
+                <a:latin typeface="Times New Roman" panose="02020603050405020304" charset="0"/>
+                <a:cs typeface="Times New Roman" panose="02020603050405020304" charset="0"/>
+              </a:rPr>
+              <a:t> Uses external APIs (tool-based integration)</a:t>
+            </a:r>
+            <a:endParaRPr lang="en-US" altLang="en-GB">
+              <a:latin typeface="Times New Roman" panose="02020603050405020304" charset="0"/>
+              <a:cs typeface="Times New Roman" panose="02020603050405020304" charset="0"/>
+            </a:endParaRPr>
+          </a:p>
+          <a:p>
+            <a:pPr marL="0" indent="0">
+              <a:buNone/>
+            </a:pPr>
+            <a:r>
+              <a:rPr lang="en-US" altLang="en-US">
+                <a:latin typeface="Times New Roman" panose="02020603050405020304" charset="0"/>
+                <a:cs typeface="Times New Roman" panose="02020603050405020304" charset="0"/>
+              </a:rPr>
+              <a:t>✔</a:t>
+            </a:r>
+            <a:r>
+              <a:rPr lang="en-US" altLang="en-GB">
+                <a:latin typeface="Times New Roman" panose="02020603050405020304" charset="0"/>
+                <a:cs typeface="Times New Roman" panose="02020603050405020304" charset="0"/>
+              </a:rPr>
+              <a:t> Performs filtering + ranking</a:t>
+            </a:r>
+            <a:endParaRPr lang="en-US" altLang="en-GB">
+              <a:latin typeface="Times New Roman" panose="02020603050405020304" charset="0"/>
+              <a:cs typeface="Times New Roman" panose="02020603050405020304" charset="0"/>
+            </a:endParaRPr>
+          </a:p>
+          <a:p>
+            <a:pPr marL="0" indent="0">
+              <a:buNone/>
+            </a:pPr>
+            <a:r>
+              <a:rPr lang="en-US" altLang="en-US">
+                <a:latin typeface="Times New Roman" panose="02020603050405020304" charset="0"/>
+                <a:cs typeface="Times New Roman" panose="02020603050405020304" charset="0"/>
+              </a:rPr>
+              <a:t>✔</a:t>
+            </a:r>
+            <a:r>
+              <a:rPr lang="en-US" altLang="en-GB">
+                <a:latin typeface="Times New Roman" panose="02020603050405020304" charset="0"/>
+                <a:cs typeface="Times New Roman" panose="02020603050405020304" charset="0"/>
+              </a:rPr>
+              <a:t> Outputs normalized job structure</a:t>
             </a:r>
             <a:endParaRPr lang="en-US" altLang="en-GB">
               <a:latin typeface="Times New Roman" panose="02020603050405020304" charset="0"/>
@@ -4073,7 +4108,7 @@
                 <a:latin typeface="Times New Roman" panose="02020603050405020304" charset="0"/>
                 <a:cs typeface="Times New Roman" panose="02020603050405020304" charset="0"/>
               </a:rPr>
-              <a:t>Key Feature</a:t>
+              <a:t>4. Aggregator Agent</a:t>
             </a:r>
             <a:endParaRPr lang="en-US" altLang="en-GB" b="1">
               <a:latin typeface="Times New Roman" panose="02020603050405020304" charset="0"/>
@@ -4084,74 +4119,71 @@
             <a:pPr marL="0" indent="0">
               <a:buNone/>
             </a:pPr>
-            <a:endParaRPr lang="en-US" altLang="en-GB">
-              <a:latin typeface="Times New Roman" panose="02020603050405020304" charset="0"/>
-              <a:cs typeface="Times New Roman" panose="02020603050405020304" charset="0"/>
-            </a:endParaRPr>
-          </a:p>
-          <a:p>
-            <a:pPr marL="0" indent="0">
-              <a:buNone/>
-            </a:pPr>
-            <a:r>
-              <a:rPr lang="en-US" altLang="en-US">
-                <a:latin typeface="Times New Roman" panose="02020603050405020304" charset="0"/>
-                <a:cs typeface="Times New Roman" panose="02020603050405020304" charset="0"/>
-              </a:rPr>
-              <a:t>✔</a:t>
-            </a:r>
-            <a:r>
-              <a:rPr lang="en-US" altLang="en-GB">
-                <a:latin typeface="Times New Roman" panose="02020603050405020304" charset="0"/>
-                <a:cs typeface="Times New Roman" panose="02020603050405020304" charset="0"/>
-              </a:rPr>
-              <a:t> Modular multi-agent architecture</a:t>
-            </a:r>
-            <a:endParaRPr lang="en-US" altLang="en-GB">
-              <a:latin typeface="Times New Roman" panose="02020603050405020304" charset="0"/>
-              <a:cs typeface="Times New Roman" panose="02020603050405020304" charset="0"/>
-            </a:endParaRPr>
-          </a:p>
-          <a:p>
-            <a:pPr marL="0" indent="0">
-              <a:buNone/>
-            </a:pPr>
-            <a:r>
-              <a:rPr lang="en-US" altLang="en-US">
-                <a:latin typeface="Times New Roman" panose="02020603050405020304" charset="0"/>
-                <a:cs typeface="Times New Roman" panose="02020603050405020304" charset="0"/>
-              </a:rPr>
-              <a:t>✔</a:t>
-            </a:r>
-            <a:r>
-              <a:rPr lang="en-US" altLang="en-GB">
-                <a:latin typeface="Times New Roman" panose="02020603050405020304" charset="0"/>
-                <a:cs typeface="Times New Roman" panose="02020603050405020304" charset="0"/>
-              </a:rPr>
-              <a:t> Scalable and easy to extend</a:t>
-            </a:r>
-            <a:endParaRPr lang="en-US" altLang="en-GB">
-              <a:latin typeface="Times New Roman" panose="02020603050405020304" charset="0"/>
-              <a:cs typeface="Times New Roman" panose="02020603050405020304" charset="0"/>
-            </a:endParaRPr>
-          </a:p>
-          <a:p>
-            <a:pPr marL="0" indent="0">
-              <a:buNone/>
-            </a:pPr>
-            <a:r>
-              <a:rPr lang="en-US" altLang="en-US">
-                <a:latin typeface="Times New Roman" panose="02020603050405020304" charset="0"/>
-                <a:cs typeface="Times New Roman" panose="02020603050405020304" charset="0"/>
-              </a:rPr>
-              <a:t>✔</a:t>
-            </a:r>
-            <a:r>
-              <a:rPr lang="en-US" altLang="en-GB">
-                <a:latin typeface="Times New Roman" panose="02020603050405020304" charset="0"/>
-                <a:cs typeface="Times New Roman" panose="02020603050405020304" charset="0"/>
-              </a:rPr>
-              <a:t> Parallel processing for efficiency</a:t>
+            <a:r>
+              <a:rPr lang="en-US" altLang="en-GB" b="1">
+                <a:latin typeface="Times New Roman" panose="02020603050405020304" charset="0"/>
+                <a:cs typeface="Times New Roman" panose="02020603050405020304" charset="0"/>
+              </a:rPr>
+              <a:t>Role</a:t>
+            </a:r>
+            <a:r>
+              <a:rPr lang="en-US" altLang="en-GB">
+                <a:latin typeface="Times New Roman" panose="02020603050405020304" charset="0"/>
+                <a:cs typeface="Times New Roman" panose="02020603050405020304" charset="0"/>
+              </a:rPr>
+              <a:t>:</a:t>
+            </a:r>
+            <a:endParaRPr lang="en-US" altLang="en-GB">
+              <a:latin typeface="Times New Roman" panose="02020603050405020304" charset="0"/>
+              <a:cs typeface="Times New Roman" panose="02020603050405020304" charset="0"/>
+            </a:endParaRPr>
+          </a:p>
+          <a:p>
+            <a:r>
+              <a:rPr lang="en-US" altLang="en-GB">
+                <a:latin typeface="Times New Roman" panose="02020603050405020304" charset="0"/>
+                <a:cs typeface="Times New Roman" panose="02020603050405020304" charset="0"/>
+              </a:rPr>
+              <a:t>Combine job results from both matchers</a:t>
+            </a:r>
+            <a:endParaRPr lang="en-US" altLang="en-GB">
+              <a:latin typeface="Times New Roman" panose="02020603050405020304" charset="0"/>
+              <a:cs typeface="Times New Roman" panose="02020603050405020304" charset="0"/>
+            </a:endParaRPr>
+          </a:p>
+          <a:p>
+            <a:r>
+              <a:rPr lang="en-US" altLang="en-GB">
+                <a:latin typeface="Times New Roman" panose="02020603050405020304" charset="0"/>
+                <a:cs typeface="Times New Roman" panose="02020603050405020304" charset="0"/>
+              </a:rPr>
+              <a:t>Remove duplicates</a:t>
+            </a:r>
+            <a:endParaRPr lang="en-US" altLang="en-GB">
+              <a:latin typeface="Times New Roman" panose="02020603050405020304" charset="0"/>
+              <a:cs typeface="Times New Roman" panose="02020603050405020304" charset="0"/>
+            </a:endParaRPr>
+          </a:p>
+          <a:p>
+            <a:r>
+              <a:rPr lang="en-US" altLang="en-GB">
+                <a:latin typeface="Times New Roman" panose="02020603050405020304" charset="0"/>
+                <a:cs typeface="Times New Roman" panose="02020603050405020304" charset="0"/>
+              </a:rPr>
+              <a:t>Sort jobs by match score</a:t>
+            </a:r>
+            <a:endParaRPr lang="en-US" altLang="en-GB">
+              <a:latin typeface="Times New Roman" panose="02020603050405020304" charset="0"/>
+              <a:cs typeface="Times New Roman" panose="02020603050405020304" charset="0"/>
+            </a:endParaRPr>
+          </a:p>
+          <a:p>
+            <a:r>
+              <a:rPr lang="en-US" altLang="en-GB">
+                <a:latin typeface="Times New Roman" panose="02020603050405020304" charset="0"/>
+                <a:cs typeface="Times New Roman" panose="02020603050405020304" charset="0"/>
+              </a:rPr>
+              <a:t>Return top results</a:t>
             </a:r>
             <a:endParaRPr lang="en-US" altLang="en-GB">
               <a:latin typeface="Times New Roman" panose="02020603050405020304" charset="0"/>
@@ -4196,29 +4228,43 @@
               <a:rPr lang="en-US" altLang="en-GB" b="1">
                 <a:latin typeface="Times New Roman" panose="02020603050405020304" charset="0"/>
                 <a:cs typeface="Times New Roman" panose="02020603050405020304" charset="0"/>
-              </a:rPr>
-              <a:t>Team Contributions</a:t>
+                <a:sym typeface="+mn-ea"/>
+              </a:rPr>
+              <a:t>Agents &amp; Features</a:t>
+            </a:r>
+            <a:endParaRPr lang="en-GB" altLang="en-US"/>
+          </a:p>
+        </p:txBody>
+      </p:sp>
+      <p:sp>
+        <p:nvSpPr>
+          <p:cNvPr id="3" name="Content Placeholder 2"/>
+          <p:cNvSpPr>
+            <a:spLocks noGrp="1"/>
+          </p:cNvSpPr>
+          <p:nvPr>
+            <p:ph idx="1"/>
+          </p:nvPr>
+        </p:nvSpPr>
+        <p:spPr/>
+        <p:txBody>
+          <a:bodyPr/>
+          <a:p>
+            <a:pPr marL="0" indent="0">
+              <a:buNone/>
+            </a:pPr>
+            <a:r>
+              <a:rPr lang="en-US" altLang="en-GB" b="1">
+                <a:latin typeface="Times New Roman" panose="02020603050405020304" charset="0"/>
+                <a:cs typeface="Times New Roman" panose="02020603050405020304" charset="0"/>
+              </a:rPr>
+              <a:t>5. Resume Tailor Agent</a:t>
             </a:r>
             <a:endParaRPr lang="en-US" altLang="en-GB" b="1">
               <a:latin typeface="Times New Roman" panose="02020603050405020304" charset="0"/>
               <a:cs typeface="Times New Roman" panose="02020603050405020304" charset="0"/>
             </a:endParaRPr>
           </a:p>
-        </p:txBody>
-      </p:sp>
-      <p:sp>
-        <p:nvSpPr>
-          <p:cNvPr id="3" name="Content Placeholder 2"/>
-          <p:cNvSpPr>
-            <a:spLocks noGrp="1"/>
-          </p:cNvSpPr>
-          <p:nvPr>
-            <p:ph idx="1"/>
-          </p:nvPr>
-        </p:nvSpPr>
-        <p:spPr/>
-        <p:txBody>
-          <a:bodyPr/>
           <a:p>
             <a:pPr marL="0" indent="0">
               <a:buNone/>
@@ -4228,21 +4274,7 @@
                 <a:latin typeface="Times New Roman" panose="02020603050405020304" charset="0"/>
                 <a:cs typeface="Times New Roman" panose="02020603050405020304" charset="0"/>
               </a:rPr>
-              <a:t>Amadou </a:t>
-            </a:r>
-            <a:r>
-              <a:rPr lang="en-GB" altLang="en-US" b="1">
-                <a:latin typeface="Times New Roman" panose="02020603050405020304" charset="0"/>
-                <a:cs typeface="Times New Roman" panose="02020603050405020304" charset="0"/>
-              </a:rPr>
-              <a:t>Sarjo </a:t>
-            </a:r>
-            <a:r>
-              <a:rPr lang="en-US" altLang="en-GB" b="1">
-                <a:latin typeface="Times New Roman" panose="02020603050405020304" charset="0"/>
-                <a:cs typeface="Times New Roman" panose="02020603050405020304" charset="0"/>
-              </a:rPr>
-              <a:t>Jallow:</a:t>
+              <a:t>Role:</a:t>
             </a:r>
             <a:endParaRPr lang="en-US" altLang="en-GB" b="1">
               <a:latin typeface="Times New Roman" panose="02020603050405020304" charset="0"/>
@@ -4250,60 +4282,38 @@
             </a:endParaRPr>
           </a:p>
           <a:p>
-            <a:pPr marL="0" indent="0">
-              <a:buNone/>
-            </a:pPr>
-            <a:endParaRPr lang="en-US" altLang="en-GB">
-              <a:latin typeface="Times New Roman" panose="02020603050405020304" charset="0"/>
-              <a:cs typeface="Times New Roman" panose="02020603050405020304" charset="0"/>
-            </a:endParaRPr>
-          </a:p>
-          <a:p>
-            <a:r>
-              <a:rPr lang="en-US" altLang="en-GB">
-                <a:latin typeface="Times New Roman" panose="02020603050405020304" charset="0"/>
-                <a:cs typeface="Times New Roman" panose="02020603050405020304" charset="0"/>
-              </a:rPr>
-              <a:t>Designed system architecture</a:t>
-            </a:r>
-            <a:endParaRPr lang="en-US" altLang="en-GB">
-              <a:latin typeface="Times New Roman" panose="02020603050405020304" charset="0"/>
-              <a:cs typeface="Times New Roman" panose="02020603050405020304" charset="0"/>
-            </a:endParaRPr>
-          </a:p>
-          <a:p>
-            <a:r>
-              <a:rPr lang="en-US" altLang="en-GB">
-                <a:latin typeface="Times New Roman" panose="02020603050405020304" charset="0"/>
-                <a:cs typeface="Times New Roman" panose="02020603050405020304" charset="0"/>
-              </a:rPr>
-              <a:t>Implemented orchestrator and agent workflow</a:t>
-            </a:r>
-            <a:endParaRPr lang="en-US" altLang="en-GB">
-              <a:latin typeface="Times New Roman" panose="02020603050405020304" charset="0"/>
-              <a:cs typeface="Times New Roman" panose="02020603050405020304" charset="0"/>
-            </a:endParaRPr>
-          </a:p>
-          <a:p>
-            <a:r>
-              <a:rPr lang="en-US" altLang="en-GB">
-                <a:latin typeface="Times New Roman" panose="02020603050405020304" charset="0"/>
-                <a:cs typeface="Times New Roman" panose="02020603050405020304" charset="0"/>
-              </a:rPr>
-              <a:t>Built resume parsing and ranking logic</a:t>
-            </a:r>
-            <a:endParaRPr lang="en-US" altLang="en-GB">
-              <a:latin typeface="Times New Roman" panose="02020603050405020304" charset="0"/>
-              <a:cs typeface="Times New Roman" panose="02020603050405020304" charset="0"/>
-            </a:endParaRPr>
-          </a:p>
-          <a:p>
-            <a:r>
-              <a:rPr lang="en-US" altLang="en-GB">
-                <a:latin typeface="Times New Roman" panose="02020603050405020304" charset="0"/>
-                <a:cs typeface="Times New Roman" panose="02020603050405020304" charset="0"/>
-              </a:rPr>
-              <a:t>Integrated APIs and UI</a:t>
+            <a:r>
+              <a:rPr lang="en-US" altLang="en-GB">
+                <a:latin typeface="Times New Roman" panose="02020603050405020304" charset="0"/>
+                <a:cs typeface="Times New Roman" panose="02020603050405020304" charset="0"/>
+              </a:rPr>
+              <a:t>Generate a job-specific resume</a:t>
+            </a:r>
+            <a:endParaRPr lang="en-US" altLang="en-GB">
+              <a:latin typeface="Times New Roman" panose="02020603050405020304" charset="0"/>
+              <a:cs typeface="Times New Roman" panose="02020603050405020304" charset="0"/>
+            </a:endParaRPr>
+          </a:p>
+          <a:p>
+            <a:r>
+              <a:rPr lang="en-US" altLang="en-GB">
+                <a:latin typeface="Times New Roman" panose="02020603050405020304" charset="0"/>
+                <a:cs typeface="Times New Roman" panose="02020603050405020304" charset="0"/>
+              </a:rPr>
+              <a:t>Highlight relevant skills and experience</a:t>
+            </a:r>
+            <a:endParaRPr lang="en-US" altLang="en-GB">
+              <a:latin typeface="Times New Roman" panose="02020603050405020304" charset="0"/>
+              <a:cs typeface="Times New Roman" panose="02020603050405020304" charset="0"/>
+            </a:endParaRPr>
+          </a:p>
+          <a:p>
+            <a:r>
+              <a:rPr lang="en-US" altLang="en-GB">
+                <a:latin typeface="Times New Roman" panose="02020603050405020304" charset="0"/>
+                <a:cs typeface="Times New Roman" panose="02020603050405020304" charset="0"/>
+              </a:rPr>
+              <a:t>Save resume locally</a:t>
             </a:r>
             <a:endParaRPr lang="en-US" altLang="en-GB">
               <a:latin typeface="Times New Roman" panose="02020603050405020304" charset="0"/>
@@ -4350,7 +4360,7 @@
                 <a:cs typeface="Times New Roman" panose="02020603050405020304" charset="0"/>
                 <a:sym typeface="+mn-ea"/>
               </a:rPr>
-              <a:t>Team Contributions</a:t>
+              <a:t>Agents &amp; Features</a:t>
             </a:r>
             <a:endParaRPr lang="en-GB" altLang="en-US"/>
           </a:p>
@@ -4377,9 +4387,8 @@
               <a:rPr lang="en-US" altLang="en-GB" b="1">
                 <a:latin typeface="Times New Roman" panose="02020603050405020304" charset="0"/>
                 <a:cs typeface="Times New Roman" panose="02020603050405020304" charset="0"/>
-                <a:sym typeface="+mn-ea"/>
-              </a:rPr>
-              <a:t>Jones Omoyibo:</a:t>
+              </a:rPr>
+              <a:t>6. Orchestrator (Non-Agent Component)</a:t>
             </a:r>
             <a:endParaRPr lang="en-US" altLang="en-GB" b="1">
               <a:latin typeface="Times New Roman" panose="02020603050405020304" charset="0"/>
@@ -4390,84 +4399,56 @@
             <a:pPr marL="0" indent="0">
               <a:buNone/>
             </a:pPr>
-            <a:endParaRPr lang="en-US" altLang="en-GB">
-              <a:latin typeface="Times New Roman" panose="02020603050405020304" charset="0"/>
-              <a:cs typeface="Times New Roman" panose="02020603050405020304" charset="0"/>
-            </a:endParaRPr>
-          </a:p>
-          <a:p>
-            <a:pPr marL="0" indent="0">
-              <a:buNone/>
-            </a:pPr>
-            <a:r>
-              <a:rPr lang="en-US" altLang="en-GB">
-                <a:latin typeface="Times New Roman" panose="02020603050405020304" charset="0"/>
-                <a:cs typeface="Times New Roman" panose="02020603050405020304" charset="0"/>
-                <a:sym typeface="+mn-ea"/>
-              </a:rPr>
-              <a:t>Designed system architecture</a:t>
-            </a:r>
-            <a:endParaRPr lang="en-US" altLang="en-GB">
-              <a:latin typeface="Times New Roman" panose="02020603050405020304" charset="0"/>
-              <a:cs typeface="Times New Roman" panose="02020603050405020304" charset="0"/>
-            </a:endParaRPr>
-          </a:p>
-          <a:p>
-            <a:pPr marL="0" indent="0">
-              <a:buNone/>
-            </a:pPr>
-            <a:r>
-              <a:rPr lang="en-US" altLang="en-GB">
-                <a:latin typeface="Times New Roman" panose="02020603050405020304" charset="0"/>
-                <a:cs typeface="Times New Roman" panose="02020603050405020304" charset="0"/>
-                <a:sym typeface="+mn-ea"/>
-              </a:rPr>
-              <a:t>Implemented orchestrator and agent workflow</a:t>
-            </a:r>
-            <a:endParaRPr lang="en-US" altLang="en-GB">
-              <a:latin typeface="Times New Roman" panose="02020603050405020304" charset="0"/>
-              <a:cs typeface="Times New Roman" panose="02020603050405020304" charset="0"/>
-            </a:endParaRPr>
-          </a:p>
-          <a:p>
-            <a:pPr marL="0" indent="0">
-              <a:buNone/>
-            </a:pPr>
-            <a:r>
-              <a:rPr lang="en-US" altLang="en-GB">
-                <a:latin typeface="Times New Roman" panose="02020603050405020304" charset="0"/>
-                <a:cs typeface="Times New Roman" panose="02020603050405020304" charset="0"/>
-                <a:sym typeface="+mn-ea"/>
-              </a:rPr>
-              <a:t>Built resume parsing and ranking logic</a:t>
-            </a:r>
-            <a:endParaRPr lang="en-US" altLang="en-GB">
-              <a:latin typeface="Times New Roman" panose="02020603050405020304" charset="0"/>
-              <a:cs typeface="Times New Roman" panose="02020603050405020304" charset="0"/>
-            </a:endParaRPr>
-          </a:p>
-          <a:p>
-            <a:pPr marL="0" indent="0">
-              <a:buNone/>
-            </a:pPr>
-            <a:r>
-              <a:rPr lang="en-US" altLang="en-GB">
-                <a:latin typeface="Times New Roman" panose="02020603050405020304" charset="0"/>
-                <a:cs typeface="Times New Roman" panose="02020603050405020304" charset="0"/>
-                <a:sym typeface="+mn-ea"/>
-              </a:rPr>
-              <a:t>Integrated APIs and UI</a:t>
-            </a:r>
-            <a:endParaRPr lang="en-US" altLang="en-GB">
-              <a:latin typeface="Times New Roman" panose="02020603050405020304" charset="0"/>
-              <a:cs typeface="Times New Roman" panose="02020603050405020304" charset="0"/>
-            </a:endParaRPr>
-          </a:p>
-          <a:p>
-            <a:pPr marL="0" indent="0">
-              <a:buNone/>
-            </a:pPr>
-            <a:endParaRPr lang="en-GB" altLang="en-US"/>
+            <a:r>
+              <a:rPr lang="en-US" altLang="en-GB" b="1">
+                <a:latin typeface="Times New Roman" panose="02020603050405020304" charset="0"/>
+                <a:cs typeface="Times New Roman" panose="02020603050405020304" charset="0"/>
+              </a:rPr>
+              <a:t>Role:</a:t>
+            </a:r>
+            <a:endParaRPr lang="en-US" altLang="en-GB" b="1">
+              <a:latin typeface="Times New Roman" panose="02020603050405020304" charset="0"/>
+              <a:cs typeface="Times New Roman" panose="02020603050405020304" charset="0"/>
+            </a:endParaRPr>
+          </a:p>
+          <a:p>
+            <a:r>
+              <a:rPr lang="en-US" altLang="en-GB">
+                <a:latin typeface="Times New Roman" panose="02020603050405020304" charset="0"/>
+                <a:cs typeface="Times New Roman" panose="02020603050405020304" charset="0"/>
+              </a:rPr>
+              <a:t>Controls system workflow</a:t>
+            </a:r>
+            <a:endParaRPr lang="en-US" altLang="en-GB">
+              <a:latin typeface="Times New Roman" panose="02020603050405020304" charset="0"/>
+              <a:cs typeface="Times New Roman" panose="02020603050405020304" charset="0"/>
+            </a:endParaRPr>
+          </a:p>
+          <a:p>
+            <a:r>
+              <a:rPr lang="en-US" altLang="en-GB">
+                <a:latin typeface="Times New Roman" panose="02020603050405020304" charset="0"/>
+                <a:cs typeface="Times New Roman" panose="02020603050405020304" charset="0"/>
+              </a:rPr>
+              <a:t>Calls agents in correct sequence</a:t>
+            </a:r>
+            <a:endParaRPr lang="en-US" altLang="en-GB">
+              <a:latin typeface="Times New Roman" panose="02020603050405020304" charset="0"/>
+              <a:cs typeface="Times New Roman" panose="02020603050405020304" charset="0"/>
+            </a:endParaRPr>
+          </a:p>
+          <a:p>
+            <a:r>
+              <a:rPr lang="en-US" altLang="en-GB">
+                <a:latin typeface="Times New Roman" panose="02020603050405020304" charset="0"/>
+                <a:cs typeface="Times New Roman" panose="02020603050405020304" charset="0"/>
+              </a:rPr>
+              <a:t>Ensures data flows correctly between components</a:t>
+            </a:r>
+            <a:endParaRPr lang="en-US" altLang="en-GB">
+              <a:latin typeface="Times New Roman" panose="02020603050405020304" charset="0"/>
+              <a:cs typeface="Times New Roman" panose="02020603050405020304" charset="0"/>
+            </a:endParaRPr>
           </a:p>
         </p:txBody>
       </p:sp>
@@ -4499,12 +4480,7 @@
             <p:ph type="title"/>
           </p:nvPr>
         </p:nvSpPr>
-        <p:spPr>
-          <a:xfrm>
-            <a:off x="609600" y="190500"/>
-            <a:ext cx="10972800" cy="582613"/>
-          </a:xfrm>
-        </p:spPr>
+        <p:spPr/>
         <p:txBody>
           <a:bodyPr/>
           <a:p>
@@ -4514,7 +4490,7 @@
                 <a:cs typeface="Times New Roman" panose="02020603050405020304" charset="0"/>
                 <a:sym typeface="+mn-ea"/>
               </a:rPr>
-              <a:t>Team Contributions</a:t>
+              <a:t>Agents &amp; Features</a:t>
             </a:r>
             <a:endParaRPr lang="en-GB" altLang="en-US"/>
           </a:p>
@@ -4538,17 +4514,15 @@
               <a:buNone/>
             </a:pPr>
             <a:r>
-              <a:rPr lang="en-GB" altLang="en-GB" b="1">
-                <a:latin typeface="Times New Roman" panose="02020603050405020304" charset="0"/>
-                <a:cs typeface="Times New Roman" panose="02020603050405020304" charset="0"/>
-                <a:sym typeface="+mn-ea"/>
-              </a:rPr>
-              <a:t>Williams Afotey Botchway:</a:t>
-            </a:r>
-            <a:endParaRPr lang="en-GB" altLang="en-GB" b="1">
-              <a:latin typeface="Times New Roman" panose="02020603050405020304" charset="0"/>
-              <a:cs typeface="Times New Roman" panose="02020603050405020304" charset="0"/>
-              <a:sym typeface="+mn-ea"/>
+              <a:rPr lang="en-US" altLang="en-GB" b="1">
+                <a:latin typeface="Times New Roman" panose="02020603050405020304" charset="0"/>
+                <a:cs typeface="Times New Roman" panose="02020603050405020304" charset="0"/>
+              </a:rPr>
+              <a:t>Key System Features</a:t>
+            </a:r>
+            <a:endParaRPr lang="en-US" altLang="en-GB" b="1">
+              <a:latin typeface="Times New Roman" panose="02020603050405020304" charset="0"/>
+              <a:cs typeface="Times New Roman" panose="02020603050405020304" charset="0"/>
             </a:endParaRPr>
           </a:p>
           <a:p>
@@ -4565,12 +4539,18 @@
               <a:buNone/>
             </a:pPr>
             <a:r>
-              <a:rPr lang="en-US" altLang="en-GB">
-                <a:latin typeface="Times New Roman" panose="02020603050405020304" charset="0"/>
-                <a:cs typeface="Times New Roman" panose="02020603050405020304" charset="0"/>
-                <a:sym typeface="+mn-ea"/>
-              </a:rPr>
-              <a:t>Designed system architecture</a:t>
+              <a:rPr lang="en-US" altLang="en-US">
+                <a:latin typeface="Times New Roman" panose="02020603050405020304" charset="0"/>
+                <a:cs typeface="Times New Roman" panose="02020603050405020304" charset="0"/>
+              </a:rPr>
+              <a:t>✔</a:t>
+            </a:r>
+            <a:r>
+              <a:rPr lang="en-US" altLang="en-GB">
+                <a:latin typeface="Times New Roman" panose="02020603050405020304" charset="0"/>
+                <a:cs typeface="Times New Roman" panose="02020603050405020304" charset="0"/>
+              </a:rPr>
+              <a:t> Modular multi-agent design</a:t>
             </a:r>
             <a:endParaRPr lang="en-US" altLang="en-GB">
               <a:latin typeface="Times New Roman" panose="02020603050405020304" charset="0"/>
@@ -4582,12 +4562,18 @@
               <a:buNone/>
             </a:pPr>
             <a:r>
-              <a:rPr lang="en-US" altLang="en-GB">
-                <a:latin typeface="Times New Roman" panose="02020603050405020304" charset="0"/>
-                <a:cs typeface="Times New Roman" panose="02020603050405020304" charset="0"/>
-                <a:sym typeface="+mn-ea"/>
-              </a:rPr>
-              <a:t>Implemented orchestrator and agent workflow</a:t>
+              <a:rPr lang="en-US" altLang="en-US">
+                <a:latin typeface="Times New Roman" panose="02020603050405020304" charset="0"/>
+                <a:cs typeface="Times New Roman" panose="02020603050405020304" charset="0"/>
+              </a:rPr>
+              <a:t>✔</a:t>
+            </a:r>
+            <a:r>
+              <a:rPr lang="en-US" altLang="en-GB">
+                <a:latin typeface="Times New Roman" panose="02020603050405020304" charset="0"/>
+                <a:cs typeface="Times New Roman" panose="02020603050405020304" charset="0"/>
+              </a:rPr>
+              <a:t> Tool-augmented agents (API integration)</a:t>
             </a:r>
             <a:endParaRPr lang="en-US" altLang="en-GB">
               <a:latin typeface="Times New Roman" panose="02020603050405020304" charset="0"/>
@@ -4599,12 +4585,18 @@
               <a:buNone/>
             </a:pPr>
             <a:r>
-              <a:rPr lang="en-US" altLang="en-GB">
-                <a:latin typeface="Times New Roman" panose="02020603050405020304" charset="0"/>
-                <a:cs typeface="Times New Roman" panose="02020603050405020304" charset="0"/>
-                <a:sym typeface="+mn-ea"/>
-              </a:rPr>
-              <a:t>Built resume parsing and ranking logic</a:t>
+              <a:rPr lang="en-US" altLang="en-US">
+                <a:latin typeface="Times New Roman" panose="02020603050405020304" charset="0"/>
+                <a:cs typeface="Times New Roman" panose="02020603050405020304" charset="0"/>
+              </a:rPr>
+              <a:t>✔</a:t>
+            </a:r>
+            <a:r>
+              <a:rPr lang="en-US" altLang="en-GB">
+                <a:latin typeface="Times New Roman" panose="02020603050405020304" charset="0"/>
+                <a:cs typeface="Times New Roman" panose="02020603050405020304" charset="0"/>
+              </a:rPr>
+              <a:t> Parallel job matching</a:t>
             </a:r>
             <a:endParaRPr lang="en-US" altLang="en-GB">
               <a:latin typeface="Times New Roman" panose="02020603050405020304" charset="0"/>
@@ -4616,14 +4608,46 @@
               <a:buNone/>
             </a:pPr>
             <a:r>
-              <a:rPr lang="en-US" altLang="en-GB">
-                <a:latin typeface="Times New Roman" panose="02020603050405020304" charset="0"/>
-                <a:cs typeface="Times New Roman" panose="02020603050405020304" charset="0"/>
-                <a:sym typeface="+mn-ea"/>
-              </a:rPr>
-              <a:t>Integrated APIs and UI</a:t>
-            </a:r>
-            <a:endParaRPr lang="en-GB" altLang="en-US"/>
+              <a:rPr lang="en-US" altLang="en-US">
+                <a:latin typeface="Times New Roman" panose="02020603050405020304" charset="0"/>
+                <a:cs typeface="Times New Roman" panose="02020603050405020304" charset="0"/>
+              </a:rPr>
+              <a:t>✔</a:t>
+            </a:r>
+            <a:r>
+              <a:rPr lang="en-US" altLang="en-GB">
+                <a:latin typeface="Times New Roman" panose="02020603050405020304" charset="0"/>
+                <a:cs typeface="Times New Roman" panose="02020603050405020304" charset="0"/>
+              </a:rPr>
+              <a:t> Built-in ranking inside matchers</a:t>
+            </a:r>
+            <a:endParaRPr lang="en-US" altLang="en-GB">
+              <a:latin typeface="Times New Roman" panose="02020603050405020304" charset="0"/>
+              <a:cs typeface="Times New Roman" panose="02020603050405020304" charset="0"/>
+            </a:endParaRPr>
+          </a:p>
+          <a:p>
+            <a:pPr marL="0" indent="0">
+              <a:buNone/>
+            </a:pPr>
+            <a:r>
+              <a:rPr lang="en-US" altLang="en-US">
+                <a:latin typeface="Times New Roman" panose="02020603050405020304" charset="0"/>
+                <a:cs typeface="Times New Roman" panose="02020603050405020304" charset="0"/>
+              </a:rPr>
+              <a:t>✔</a:t>
+            </a:r>
+            <a:r>
+              <a:rPr lang="en-US" altLang="en-GB">
+                <a:latin typeface="Times New Roman" panose="02020603050405020304" charset="0"/>
+                <a:cs typeface="Times New Roman" panose="02020603050405020304" charset="0"/>
+              </a:rPr>
+              <a:t> Clean separation of responsibilities</a:t>
+            </a:r>
+            <a:endParaRPr lang="en-US" altLang="en-GB">
+              <a:latin typeface="Times New Roman" panose="02020603050405020304" charset="0"/>
+              <a:cs typeface="Times New Roman" panose="02020603050405020304" charset="0"/>
+            </a:endParaRPr>
           </a:p>
         </p:txBody>
       </p:sp>
@@ -4663,191 +4687,40 @@
               <a:rPr lang="en-US" altLang="en-GB" b="1">
                 <a:latin typeface="Times New Roman" panose="02020603050405020304" charset="0"/>
                 <a:cs typeface="Times New Roman" panose="02020603050405020304" charset="0"/>
-              </a:rPr>
-              <a:t>GitHub Repository</a:t>
-            </a:r>
-            <a:endParaRPr lang="en-US" altLang="en-GB" b="1">
-              <a:latin typeface="Times New Roman" panose="02020603050405020304" charset="0"/>
-              <a:cs typeface="Times New Roman" panose="02020603050405020304" charset="0"/>
-            </a:endParaRPr>
-          </a:p>
-        </p:txBody>
-      </p:sp>
-      <p:sp>
-        <p:nvSpPr>
-          <p:cNvPr id="3" name="Content Placeholder 2"/>
-          <p:cNvSpPr>
-            <a:spLocks noGrp="1"/>
-          </p:cNvSpPr>
+                <a:sym typeface="+mn-ea"/>
+              </a:rPr>
+              <a:t>UI Demo Flow </a:t>
+            </a:r>
+            <a:endParaRPr lang="en-GB" altLang="en-US"/>
+          </a:p>
+        </p:txBody>
+      </p:sp>
+      <p:pic>
+        <p:nvPicPr>
+          <p:cNvPr id="4" name="Content Placeholder 3" descr="step-0"/>
+          <p:cNvPicPr>
+            <a:picLocks noChangeAspect="1"/>
+          </p:cNvPicPr>
           <p:nvPr>
             <p:ph idx="1"/>
           </p:nvPr>
-        </p:nvSpPr>
-        <p:spPr/>
-        <p:txBody>
-          <a:bodyPr/>
-          <a:p>
-            <a:pPr marL="0" indent="0">
-              <a:buNone/>
-            </a:pPr>
-            <a:r>
-              <a:rPr lang="en-US" altLang="en-GB" b="1">
-                <a:latin typeface="Times New Roman" panose="02020603050405020304" charset="0"/>
-                <a:cs typeface="Times New Roman" panose="02020603050405020304" charset="0"/>
-              </a:rPr>
-              <a:t>Repository Link</a:t>
-            </a:r>
-            <a:r>
-              <a:rPr lang="en-US" altLang="en-GB">
-                <a:latin typeface="Times New Roman" panose="02020603050405020304" charset="0"/>
-                <a:cs typeface="Times New Roman" panose="02020603050405020304" charset="0"/>
-              </a:rPr>
-              <a:t>:</a:t>
-            </a:r>
-            <a:endParaRPr lang="en-US" altLang="en-GB">
-              <a:latin typeface="Times New Roman" panose="02020603050405020304" charset="0"/>
-              <a:cs typeface="Times New Roman" panose="02020603050405020304" charset="0"/>
-            </a:endParaRPr>
-          </a:p>
-          <a:p>
-            <a:pPr marL="0" indent="0">
-              <a:buNone/>
-            </a:pPr>
-            <a:r>
-              <a:rPr lang="en-US" altLang="en-GB">
-                <a:latin typeface="Times New Roman" panose="02020603050405020304" charset="0"/>
-                <a:cs typeface="Times New Roman" panose="02020603050405020304" charset="0"/>
-              </a:rPr>
-              <a:t>https://github.com/AMS-JR/ai-career-assistant</a:t>
-            </a:r>
-            <a:endParaRPr lang="en-US" altLang="en-GB">
-              <a:latin typeface="Times New Roman" panose="02020603050405020304" charset="0"/>
-              <a:cs typeface="Times New Roman" panose="02020603050405020304" charset="0"/>
-            </a:endParaRPr>
-          </a:p>
-          <a:p>
-            <a:pPr marL="0" indent="0">
-              <a:buNone/>
-            </a:pPr>
-            <a:endParaRPr lang="en-US" altLang="en-GB">
-              <a:latin typeface="Times New Roman" panose="02020603050405020304" charset="0"/>
-              <a:cs typeface="Times New Roman" panose="02020603050405020304" charset="0"/>
-            </a:endParaRPr>
-          </a:p>
-          <a:p>
-            <a:pPr marL="0" indent="0">
-              <a:buNone/>
-            </a:pPr>
-            <a:r>
-              <a:rPr lang="en-US" altLang="en-GB" b="1">
-                <a:latin typeface="Times New Roman" panose="02020603050405020304" charset="0"/>
-                <a:cs typeface="Times New Roman" panose="02020603050405020304" charset="0"/>
-              </a:rPr>
-              <a:t>Includes</a:t>
-            </a:r>
-            <a:r>
-              <a:rPr lang="en-US" altLang="en-GB">
-                <a:latin typeface="Times New Roman" panose="02020603050405020304" charset="0"/>
-                <a:cs typeface="Times New Roman" panose="02020603050405020304" charset="0"/>
-              </a:rPr>
-              <a:t>:</a:t>
-            </a:r>
-            <a:endParaRPr lang="en-US" altLang="en-GB">
-              <a:latin typeface="Times New Roman" panose="02020603050405020304" charset="0"/>
-              <a:cs typeface="Times New Roman" panose="02020603050405020304" charset="0"/>
-            </a:endParaRPr>
-          </a:p>
-          <a:p>
-            <a:pPr marL="0" indent="0">
-              <a:buNone/>
-            </a:pPr>
-            <a:endParaRPr lang="en-US" altLang="en-GB">
-              <a:latin typeface="Times New Roman" panose="02020603050405020304" charset="0"/>
-              <a:cs typeface="Times New Roman" panose="02020603050405020304" charset="0"/>
-            </a:endParaRPr>
-          </a:p>
-          <a:p>
-            <a:r>
-              <a:rPr lang="en-US" altLang="en-GB">
-                <a:latin typeface="Times New Roman" panose="02020603050405020304" charset="0"/>
-                <a:cs typeface="Times New Roman" panose="02020603050405020304" charset="0"/>
-              </a:rPr>
-              <a:t>Full source code</a:t>
-            </a:r>
-            <a:endParaRPr lang="en-US" altLang="en-GB">
-              <a:latin typeface="Times New Roman" panose="02020603050405020304" charset="0"/>
-              <a:cs typeface="Times New Roman" panose="02020603050405020304" charset="0"/>
-            </a:endParaRPr>
-          </a:p>
-          <a:p>
-            <a:r>
-              <a:rPr lang="en-US" altLang="en-GB">
-                <a:latin typeface="Times New Roman" panose="02020603050405020304" charset="0"/>
-                <a:cs typeface="Times New Roman" panose="02020603050405020304" charset="0"/>
-              </a:rPr>
-              <a:t>Agent implementations</a:t>
-            </a:r>
-            <a:endParaRPr lang="en-US" altLang="en-GB">
-              <a:latin typeface="Times New Roman" panose="02020603050405020304" charset="0"/>
-              <a:cs typeface="Times New Roman" panose="02020603050405020304" charset="0"/>
-            </a:endParaRPr>
-          </a:p>
-          <a:p>
-            <a:r>
-              <a:rPr lang="en-US" altLang="en-GB">
-                <a:latin typeface="Times New Roman" panose="02020603050405020304" charset="0"/>
-                <a:cs typeface="Times New Roman" panose="02020603050405020304" charset="0"/>
-              </a:rPr>
-              <a:t>API integrations</a:t>
-            </a:r>
-            <a:endParaRPr lang="en-US" altLang="en-GB">
-              <a:latin typeface="Times New Roman" panose="02020603050405020304" charset="0"/>
-              <a:cs typeface="Times New Roman" panose="02020603050405020304" charset="0"/>
-            </a:endParaRPr>
-          </a:p>
-          <a:p>
-            <a:r>
-              <a:rPr lang="en-US" altLang="en-GB">
-                <a:latin typeface="Times New Roman" panose="02020603050405020304" charset="0"/>
-                <a:cs typeface="Times New Roman" panose="02020603050405020304" charset="0"/>
-              </a:rPr>
-              <a:t>UI (Gradio)</a:t>
-            </a:r>
-            <a:endParaRPr lang="en-US" altLang="en-GB">
-              <a:latin typeface="Times New Roman" panose="02020603050405020304" charset="0"/>
-              <a:cs typeface="Times New Roman" panose="02020603050405020304" charset="0"/>
-            </a:endParaRPr>
-          </a:p>
-        </p:txBody>
-      </p:sp>
-      <p:sp>
-        <p:nvSpPr>
-          <p:cNvPr id="4" name="Text Box 3"/>
-          <p:cNvSpPr txBox="1"/>
-          <p:nvPr/>
-        </p:nvSpPr>
+        </p:nvPicPr>
+        <p:blipFill>
+          <a:blip r:embed="rId1"/>
+          <a:stretch>
+            <a:fillRect/>
+          </a:stretch>
+        </p:blipFill>
         <p:spPr>
           <a:xfrm>
-            <a:off x="3556000" y="3260408"/>
-            <a:ext cx="5080000" cy="337185"/>
+            <a:off x="915035" y="1174750"/>
+            <a:ext cx="10913745" cy="5217160"/>
           </a:xfrm>
           <a:prstGeom prst="rect">
             <a:avLst/>
           </a:prstGeom>
         </p:spPr>
-        <p:txBody>
-          <a:bodyPr>
-            <a:spAutoFit/>
-          </a:bodyPr>
-          <a:p>
-            <a:r>
-              <a:rPr sz="1600"/>
-              <a:t>GitHub Repository</a:t>
-            </a:r>
-            <a:endParaRPr sz="1600"/>
-          </a:p>
-        </p:txBody>
-      </p:sp>
+      </p:pic>
     </p:spTree>
   </p:cSld>
   <p:clrMapOvr>
@@ -4884,111 +4757,40 @@
               <a:rPr lang="en-US" altLang="en-GB" b="1">
                 <a:latin typeface="Times New Roman" panose="02020603050405020304" charset="0"/>
                 <a:cs typeface="Times New Roman" panose="02020603050405020304" charset="0"/>
-              </a:rPr>
-              <a:t>Conclusion &amp; SCI Reflection</a:t>
-            </a:r>
-            <a:endParaRPr lang="en-US" altLang="en-GB" b="1">
-              <a:latin typeface="Times New Roman" panose="02020603050405020304" charset="0"/>
-              <a:cs typeface="Times New Roman" panose="02020603050405020304" charset="0"/>
-            </a:endParaRPr>
-          </a:p>
-        </p:txBody>
-      </p:sp>
-      <p:sp>
-        <p:nvSpPr>
-          <p:cNvPr id="3" name="Content Placeholder 2"/>
-          <p:cNvSpPr>
-            <a:spLocks noGrp="1"/>
-          </p:cNvSpPr>
+                <a:sym typeface="+mn-ea"/>
+              </a:rPr>
+              <a:t>UI Demo Flow </a:t>
+            </a:r>
+            <a:endParaRPr lang="en-GB" altLang="en-US"/>
+          </a:p>
+        </p:txBody>
+      </p:sp>
+      <p:pic>
+        <p:nvPicPr>
+          <p:cNvPr id="4" name="Content Placeholder 3" descr="step-0.1"/>
+          <p:cNvPicPr>
+            <a:picLocks noChangeAspect="1"/>
+          </p:cNvPicPr>
           <p:nvPr>
             <p:ph idx="1"/>
           </p:nvPr>
-        </p:nvSpPr>
-        <p:spPr/>
-        <p:txBody>
-          <a:bodyPr/>
-          <a:p>
-            <a:pPr marL="0" indent="0">
-              <a:buNone/>
-            </a:pPr>
-            <a:r>
-              <a:rPr lang="en-US" altLang="en-GB" b="1">
-                <a:latin typeface="Times New Roman" panose="02020603050405020304" charset="0"/>
-                <a:cs typeface="Times New Roman" panose="02020603050405020304" charset="0"/>
-              </a:rPr>
-              <a:t>Conclusion</a:t>
-            </a:r>
-            <a:r>
-              <a:rPr lang="en-US" altLang="en-GB">
-                <a:latin typeface="Times New Roman" panose="02020603050405020304" charset="0"/>
-                <a:cs typeface="Times New Roman" panose="02020603050405020304" charset="0"/>
-              </a:rPr>
-              <a:t>:</a:t>
-            </a:r>
-            <a:endParaRPr lang="en-US" altLang="en-GB">
-              <a:latin typeface="Times New Roman" panose="02020603050405020304" charset="0"/>
-              <a:cs typeface="Times New Roman" panose="02020603050405020304" charset="0"/>
-            </a:endParaRPr>
-          </a:p>
-          <a:p>
-            <a:pPr marL="0" indent="0">
-              <a:buNone/>
-            </a:pPr>
-            <a:endParaRPr lang="en-US" altLang="en-GB">
-              <a:latin typeface="Times New Roman" panose="02020603050405020304" charset="0"/>
-              <a:cs typeface="Times New Roman" panose="02020603050405020304" charset="0"/>
-            </a:endParaRPr>
-          </a:p>
-          <a:p>
-            <a:pPr marL="0" indent="0">
-              <a:buNone/>
-            </a:pPr>
-            <a:r>
-              <a:rPr lang="en-US" altLang="en-GB">
-                <a:latin typeface="Times New Roman" panose="02020603050405020304" charset="0"/>
-                <a:cs typeface="Times New Roman" panose="02020603050405020304" charset="0"/>
-              </a:rPr>
-              <a:t>Successfully built a scalable AI-driven job matching system</a:t>
-            </a:r>
-            <a:endParaRPr lang="en-US" altLang="en-GB">
-              <a:latin typeface="Times New Roman" panose="02020603050405020304" charset="0"/>
-              <a:cs typeface="Times New Roman" panose="02020603050405020304" charset="0"/>
-            </a:endParaRPr>
-          </a:p>
-          <a:p>
-            <a:pPr marL="0" indent="0">
-              <a:buNone/>
-            </a:pPr>
-            <a:r>
-              <a:rPr lang="en-US" altLang="en-GB">
-                <a:latin typeface="Times New Roman" panose="02020603050405020304" charset="0"/>
-                <a:cs typeface="Times New Roman" panose="02020603050405020304" charset="0"/>
-              </a:rPr>
-              <a:t>Demonstrated the power of multi-agent architectures</a:t>
-            </a:r>
-            <a:endParaRPr lang="en-US" altLang="en-GB">
-              <a:latin typeface="Times New Roman" panose="02020603050405020304" charset="0"/>
-              <a:cs typeface="Times New Roman" panose="02020603050405020304" charset="0"/>
-            </a:endParaRPr>
-          </a:p>
-          <a:p>
-            <a:pPr marL="0" indent="0">
-              <a:buNone/>
-            </a:pPr>
-            <a:r>
-              <a:rPr lang="en-US" altLang="en-GB">
-                <a:latin typeface="Times New Roman" panose="02020603050405020304" charset="0"/>
-                <a:cs typeface="Times New Roman" panose="02020603050405020304" charset="0"/>
-              </a:rPr>
-              <a:t>Improved efficiency of job searching and resume customization</a:t>
-            </a:r>
-            <a:endParaRPr lang="en-US" altLang="en-GB">
-              <a:latin typeface="Times New Roman" panose="02020603050405020304" charset="0"/>
-              <a:cs typeface="Times New Roman" panose="02020603050405020304" charset="0"/>
-            </a:endParaRPr>
-          </a:p>
-        </p:txBody>
-      </p:sp>
+        </p:nvPicPr>
+        <p:blipFill>
+          <a:blip r:embed="rId1"/>
+          <a:stretch>
+            <a:fillRect/>
+          </a:stretch>
+        </p:blipFill>
+        <p:spPr>
+          <a:xfrm>
+            <a:off x="448310" y="1034415"/>
+            <a:ext cx="11295380" cy="5085080"/>
+          </a:xfrm>
+          <a:prstGeom prst="rect">
+            <a:avLst/>
+          </a:prstGeom>
+        </p:spPr>
+      </p:pic>
     </p:spTree>
   </p:cSld>
   <p:clrMapOvr>
@@ -5045,7 +4847,12 @@
             <p:ph idx="1"/>
           </p:nvPr>
         </p:nvSpPr>
-        <p:spPr/>
+        <p:spPr>
+          <a:xfrm>
+            <a:off x="609600" y="952500"/>
+            <a:ext cx="10972800" cy="4953000"/>
+          </a:xfrm>
+        </p:spPr>
         <p:txBody>
           <a:bodyPr/>
           <a:p>
@@ -5114,6 +4921,19 @@
                 <a:cs typeface="Times New Roman" panose="02020603050405020304" charset="0"/>
               </a:rPr>
               <a:t>Agents &amp; Features</a:t>
+            </a:r>
+            <a:endParaRPr lang="en-US" altLang="en-GB">
+              <a:latin typeface="Times New Roman" panose="02020603050405020304" charset="0"/>
+              <a:cs typeface="Times New Roman" panose="02020603050405020304" charset="0"/>
+            </a:endParaRPr>
+          </a:p>
+          <a:p>
+            <a:r>
+              <a:rPr lang="en-US" altLang="en-GB">
+                <a:latin typeface="Times New Roman" panose="02020603050405020304" charset="0"/>
+                <a:cs typeface="Times New Roman" panose="02020603050405020304" charset="0"/>
+              </a:rPr>
+              <a:t> UI Demo Flow</a:t>
             </a:r>
             <a:endParaRPr lang="en-US" altLang="en-GB">
               <a:latin typeface="Times New Roman" panose="02020603050405020304" charset="0"/>
@@ -5197,14 +5017,578 @@
               <a:rPr lang="en-US" altLang="en-GB" b="1">
                 <a:latin typeface="Times New Roman" panose="02020603050405020304" charset="0"/>
                 <a:cs typeface="Times New Roman" panose="02020603050405020304" charset="0"/>
+              </a:rPr>
+              <a:t>UI Demo Flow </a:t>
+            </a:r>
+            <a:endParaRPr lang="en-US" altLang="en-GB" b="1">
+              <a:latin typeface="Times New Roman" panose="02020603050405020304" charset="0"/>
+              <a:cs typeface="Times New Roman" panose="02020603050405020304" charset="0"/>
+            </a:endParaRPr>
+          </a:p>
+        </p:txBody>
+      </p:sp>
+      <p:pic>
+        <p:nvPicPr>
+          <p:cNvPr id="4" name="Content Placeholder 3" descr="step-1"/>
+          <p:cNvPicPr>
+            <a:picLocks noChangeAspect="1"/>
+          </p:cNvPicPr>
+          <p:nvPr>
+            <p:ph idx="1"/>
+          </p:nvPr>
+        </p:nvPicPr>
+        <p:blipFill>
+          <a:blip r:embed="rId1"/>
+          <a:stretch>
+            <a:fillRect/>
+          </a:stretch>
+        </p:blipFill>
+        <p:spPr>
+          <a:xfrm>
+            <a:off x="3256915" y="895350"/>
+            <a:ext cx="5674995" cy="5962650"/>
+          </a:xfrm>
+          <a:prstGeom prst="rect">
+            <a:avLst/>
+          </a:prstGeom>
+        </p:spPr>
+      </p:pic>
+    </p:spTree>
+  </p:cSld>
+  <p:clrMapOvr>
+    <a:masterClrMapping/>
+  </p:clrMapOvr>
+</p:sld>
+</file>
+
+<file path=ppt/slides/slide21.xml><?xml version="1.0" encoding="utf-8"?>
+<p:sld xmlns:a="http://schemas.openxmlformats.org/drawingml/2006/main" xmlns:r="http://schemas.openxmlformats.org/officeDocument/2006/relationships" xmlns:p="http://schemas.openxmlformats.org/presentationml/2006/main">
+  <p:cSld>
+    <p:spTree>
+      <p:nvGrpSpPr>
+        <p:cNvPr id="1" name=""/>
+        <p:cNvGrpSpPr/>
+        <p:nvPr/>
+      </p:nvGrpSpPr>
+      <p:grpSpPr/>
+      <p:sp>
+        <p:nvSpPr>
+          <p:cNvPr id="2" name="Title 1"/>
+          <p:cNvSpPr>
+            <a:spLocks noGrp="1"/>
+          </p:cNvSpPr>
+          <p:nvPr>
+            <p:ph type="title"/>
+          </p:nvPr>
+        </p:nvSpPr>
+        <p:spPr/>
+        <p:txBody>
+          <a:bodyPr/>
+          <a:p>
+            <a:r>
+              <a:rPr lang="en-US" altLang="en-GB" b="1">
+                <a:latin typeface="Times New Roman" panose="02020603050405020304" charset="0"/>
+                <a:cs typeface="Times New Roman" panose="02020603050405020304" charset="0"/>
                 <a:sym typeface="+mn-ea"/>
               </a:rPr>
-              <a:t>Conclusion &amp; SCI Reflection</a:t>
+              <a:t>UI Demo Flow </a:t>
             </a:r>
             <a:endParaRPr lang="en-GB" altLang="en-US"/>
           </a:p>
         </p:txBody>
       </p:sp>
+      <p:pic>
+        <p:nvPicPr>
+          <p:cNvPr id="4" name="Content Placeholder 3" descr="step-1.1"/>
+          <p:cNvPicPr>
+            <a:picLocks noChangeAspect="1"/>
+          </p:cNvPicPr>
+          <p:nvPr>
+            <p:ph idx="1"/>
+          </p:nvPr>
+        </p:nvPicPr>
+        <p:blipFill>
+          <a:blip r:embed="rId1"/>
+          <a:stretch>
+            <a:fillRect/>
+          </a:stretch>
+        </p:blipFill>
+        <p:spPr>
+          <a:xfrm>
+            <a:off x="3321685" y="1236345"/>
+            <a:ext cx="5777865" cy="5043170"/>
+          </a:xfrm>
+          <a:prstGeom prst="rect">
+            <a:avLst/>
+          </a:prstGeom>
+        </p:spPr>
+      </p:pic>
+    </p:spTree>
+  </p:cSld>
+  <p:clrMapOvr>
+    <a:masterClrMapping/>
+  </p:clrMapOvr>
+</p:sld>
+</file>
+
+<file path=ppt/slides/slide22.xml><?xml version="1.0" encoding="utf-8"?>
+<p:sld xmlns:a="http://schemas.openxmlformats.org/drawingml/2006/main" xmlns:r="http://schemas.openxmlformats.org/officeDocument/2006/relationships" xmlns:p="http://schemas.openxmlformats.org/presentationml/2006/main">
+  <p:cSld>
+    <p:spTree>
+      <p:nvGrpSpPr>
+        <p:cNvPr id="1" name=""/>
+        <p:cNvGrpSpPr/>
+        <p:nvPr/>
+      </p:nvGrpSpPr>
+      <p:grpSpPr/>
+      <p:sp>
+        <p:nvSpPr>
+          <p:cNvPr id="2" name="Title 1"/>
+          <p:cNvSpPr>
+            <a:spLocks noGrp="1"/>
+          </p:cNvSpPr>
+          <p:nvPr>
+            <p:ph type="title"/>
+          </p:nvPr>
+        </p:nvSpPr>
+        <p:spPr/>
+        <p:txBody>
+          <a:bodyPr/>
+          <a:p>
+            <a:r>
+              <a:rPr lang="en-US" altLang="en-GB" b="1">
+                <a:latin typeface="Times New Roman" panose="02020603050405020304" charset="0"/>
+                <a:cs typeface="Times New Roman" panose="02020603050405020304" charset="0"/>
+                <a:sym typeface="+mn-ea"/>
+              </a:rPr>
+              <a:t>UI Demo Flow </a:t>
+            </a:r>
+            <a:endParaRPr lang="en-GB" altLang="en-US"/>
+          </a:p>
+        </p:txBody>
+      </p:sp>
+      <p:pic>
+        <p:nvPicPr>
+          <p:cNvPr id="4" name="Content Placeholder 3" descr="step-1.2"/>
+          <p:cNvPicPr>
+            <a:picLocks noChangeAspect="1"/>
+          </p:cNvPicPr>
+          <p:nvPr>
+            <p:ph idx="1"/>
+          </p:nvPr>
+        </p:nvPicPr>
+        <p:blipFill>
+          <a:blip r:embed="rId1"/>
+          <a:stretch>
+            <a:fillRect/>
+          </a:stretch>
+        </p:blipFill>
+        <p:spPr>
+          <a:xfrm>
+            <a:off x="3943985" y="580390"/>
+            <a:ext cx="4230370" cy="6170930"/>
+          </a:xfrm>
+          <a:prstGeom prst="rect">
+            <a:avLst/>
+          </a:prstGeom>
+        </p:spPr>
+      </p:pic>
+    </p:spTree>
+  </p:cSld>
+  <p:clrMapOvr>
+    <a:masterClrMapping/>
+  </p:clrMapOvr>
+</p:sld>
+</file>
+
+<file path=ppt/slides/slide23.xml><?xml version="1.0" encoding="utf-8"?>
+<p:sld xmlns:a="http://schemas.openxmlformats.org/drawingml/2006/main" xmlns:r="http://schemas.openxmlformats.org/officeDocument/2006/relationships" xmlns:p="http://schemas.openxmlformats.org/presentationml/2006/main">
+  <p:cSld>
+    <p:spTree>
+      <p:nvGrpSpPr>
+        <p:cNvPr id="1" name=""/>
+        <p:cNvGrpSpPr/>
+        <p:nvPr/>
+      </p:nvGrpSpPr>
+      <p:grpSpPr/>
+      <p:sp>
+        <p:nvSpPr>
+          <p:cNvPr id="2" name="Title 1"/>
+          <p:cNvSpPr>
+            <a:spLocks noGrp="1"/>
+          </p:cNvSpPr>
+          <p:nvPr>
+            <p:ph type="title"/>
+          </p:nvPr>
+        </p:nvSpPr>
+        <p:spPr/>
+        <p:txBody>
+          <a:bodyPr/>
+          <a:p>
+            <a:r>
+              <a:rPr lang="en-US" altLang="en-GB" b="1">
+                <a:latin typeface="Times New Roman" panose="02020603050405020304" charset="0"/>
+                <a:cs typeface="Times New Roman" panose="02020603050405020304" charset="0"/>
+                <a:sym typeface="+mn-ea"/>
+              </a:rPr>
+              <a:t>UI Demo Flow </a:t>
+            </a:r>
+            <a:endParaRPr lang="en-GB" altLang="en-US"/>
+          </a:p>
+        </p:txBody>
+      </p:sp>
+      <p:pic>
+        <p:nvPicPr>
+          <p:cNvPr id="4" name="Content Placeholder 3" descr="step-2"/>
+          <p:cNvPicPr>
+            <a:picLocks noChangeAspect="1"/>
+          </p:cNvPicPr>
+          <p:nvPr>
+            <p:ph idx="1"/>
+          </p:nvPr>
+        </p:nvPicPr>
+        <p:blipFill>
+          <a:blip r:embed="rId1"/>
+          <a:stretch>
+            <a:fillRect/>
+          </a:stretch>
+        </p:blipFill>
+        <p:spPr>
+          <a:xfrm>
+            <a:off x="1889125" y="1577340"/>
+            <a:ext cx="8996680" cy="4293870"/>
+          </a:xfrm>
+          <a:prstGeom prst="rect">
+            <a:avLst/>
+          </a:prstGeom>
+        </p:spPr>
+      </p:pic>
+    </p:spTree>
+  </p:cSld>
+  <p:clrMapOvr>
+    <a:masterClrMapping/>
+  </p:clrMapOvr>
+</p:sld>
+</file>
+
+<file path=ppt/slides/slide24.xml><?xml version="1.0" encoding="utf-8"?>
+<p:sld xmlns:a="http://schemas.openxmlformats.org/drawingml/2006/main" xmlns:r="http://schemas.openxmlformats.org/officeDocument/2006/relationships" xmlns:p="http://schemas.openxmlformats.org/presentationml/2006/main">
+  <p:cSld>
+    <p:spTree>
+      <p:nvGrpSpPr>
+        <p:cNvPr id="1" name=""/>
+        <p:cNvGrpSpPr/>
+        <p:nvPr/>
+      </p:nvGrpSpPr>
+      <p:grpSpPr/>
+      <p:sp>
+        <p:nvSpPr>
+          <p:cNvPr id="2" name="Title 1"/>
+          <p:cNvSpPr>
+            <a:spLocks noGrp="1"/>
+          </p:cNvSpPr>
+          <p:nvPr>
+            <p:ph type="title"/>
+          </p:nvPr>
+        </p:nvSpPr>
+        <p:spPr/>
+        <p:txBody>
+          <a:bodyPr/>
+          <a:p>
+            <a:r>
+              <a:rPr lang="en-US" altLang="en-GB" b="1">
+                <a:latin typeface="Times New Roman" panose="02020603050405020304" charset="0"/>
+                <a:cs typeface="Times New Roman" panose="02020603050405020304" charset="0"/>
+                <a:sym typeface="+mn-ea"/>
+              </a:rPr>
+              <a:t>UI Demo Flow </a:t>
+            </a:r>
+            <a:endParaRPr lang="en-GB" altLang="en-US"/>
+          </a:p>
+        </p:txBody>
+      </p:sp>
+      <p:pic>
+        <p:nvPicPr>
+          <p:cNvPr id="4" name="Content Placeholder 3" descr="step-2.1"/>
+          <p:cNvPicPr>
+            <a:picLocks noChangeAspect="1"/>
+          </p:cNvPicPr>
+          <p:nvPr>
+            <p:ph idx="1"/>
+          </p:nvPr>
+        </p:nvPicPr>
+        <p:blipFill>
+          <a:blip r:embed="rId1"/>
+          <a:stretch>
+            <a:fillRect/>
+          </a:stretch>
+        </p:blipFill>
+        <p:spPr>
+          <a:xfrm>
+            <a:off x="2505075" y="1013460"/>
+            <a:ext cx="7181850" cy="5289550"/>
+          </a:xfrm>
+          <a:prstGeom prst="rect">
+            <a:avLst/>
+          </a:prstGeom>
+        </p:spPr>
+      </p:pic>
+    </p:spTree>
+  </p:cSld>
+  <p:clrMapOvr>
+    <a:masterClrMapping/>
+  </p:clrMapOvr>
+</p:sld>
+</file>
+
+<file path=ppt/slides/slide25.xml><?xml version="1.0" encoding="utf-8"?>
+<p:sld xmlns:a="http://schemas.openxmlformats.org/drawingml/2006/main" xmlns:r="http://schemas.openxmlformats.org/officeDocument/2006/relationships" xmlns:p="http://schemas.openxmlformats.org/presentationml/2006/main">
+  <p:cSld>
+    <p:spTree>
+      <p:nvGrpSpPr>
+        <p:cNvPr id="1" name=""/>
+        <p:cNvGrpSpPr/>
+        <p:nvPr/>
+      </p:nvGrpSpPr>
+      <p:grpSpPr/>
+      <p:sp>
+        <p:nvSpPr>
+          <p:cNvPr id="2" name="Title 1"/>
+          <p:cNvSpPr>
+            <a:spLocks noGrp="1"/>
+          </p:cNvSpPr>
+          <p:nvPr>
+            <p:ph type="title"/>
+          </p:nvPr>
+        </p:nvSpPr>
+        <p:spPr/>
+        <p:txBody>
+          <a:bodyPr/>
+          <a:p>
+            <a:r>
+              <a:rPr lang="en-US" altLang="en-GB" b="1">
+                <a:latin typeface="Times New Roman" panose="02020603050405020304" charset="0"/>
+                <a:cs typeface="Times New Roman" panose="02020603050405020304" charset="0"/>
+                <a:sym typeface="+mn-ea"/>
+              </a:rPr>
+              <a:t>UI Demo Flow </a:t>
+            </a:r>
+            <a:endParaRPr lang="en-GB" altLang="en-US"/>
+          </a:p>
+        </p:txBody>
+      </p:sp>
+      <p:pic>
+        <p:nvPicPr>
+          <p:cNvPr id="4" name="Content Placeholder 3" descr="step-3"/>
+          <p:cNvPicPr>
+            <a:picLocks noChangeAspect="1"/>
+          </p:cNvPicPr>
+          <p:nvPr>
+            <p:ph idx="1"/>
+          </p:nvPr>
+        </p:nvPicPr>
+        <p:blipFill>
+          <a:blip r:embed="rId1"/>
+          <a:stretch>
+            <a:fillRect/>
+          </a:stretch>
+        </p:blipFill>
+        <p:spPr>
+          <a:xfrm>
+            <a:off x="2018665" y="1202690"/>
+            <a:ext cx="8270875" cy="5052060"/>
+          </a:xfrm>
+          <a:prstGeom prst="rect">
+            <a:avLst/>
+          </a:prstGeom>
+        </p:spPr>
+      </p:pic>
+    </p:spTree>
+  </p:cSld>
+  <p:clrMapOvr>
+    <a:masterClrMapping/>
+  </p:clrMapOvr>
+</p:sld>
+</file>
+
+<file path=ppt/slides/slide26.xml><?xml version="1.0" encoding="utf-8"?>
+<p:sld xmlns:a="http://schemas.openxmlformats.org/drawingml/2006/main" xmlns:r="http://schemas.openxmlformats.org/officeDocument/2006/relationships" xmlns:p="http://schemas.openxmlformats.org/presentationml/2006/main">
+  <p:cSld>
+    <p:spTree>
+      <p:nvGrpSpPr>
+        <p:cNvPr id="1" name=""/>
+        <p:cNvGrpSpPr/>
+        <p:nvPr/>
+      </p:nvGrpSpPr>
+      <p:grpSpPr/>
+      <p:sp>
+        <p:nvSpPr>
+          <p:cNvPr id="2" name="Title 1"/>
+          <p:cNvSpPr>
+            <a:spLocks noGrp="1"/>
+          </p:cNvSpPr>
+          <p:nvPr>
+            <p:ph type="title"/>
+          </p:nvPr>
+        </p:nvSpPr>
+        <p:spPr/>
+        <p:txBody>
+          <a:bodyPr/>
+          <a:p>
+            <a:r>
+              <a:rPr lang="en-US" altLang="en-GB" b="1">
+                <a:latin typeface="Times New Roman" panose="02020603050405020304" charset="0"/>
+                <a:cs typeface="Times New Roman" panose="02020603050405020304" charset="0"/>
+                <a:sym typeface="+mn-ea"/>
+              </a:rPr>
+              <a:t>UI Demo Flow </a:t>
+            </a:r>
+            <a:endParaRPr lang="en-GB" altLang="en-US"/>
+          </a:p>
+        </p:txBody>
+      </p:sp>
+      <p:pic>
+        <p:nvPicPr>
+          <p:cNvPr id="4" name="Content Placeholder 3" descr="step-3.1"/>
+          <p:cNvPicPr>
+            <a:picLocks noChangeAspect="1"/>
+          </p:cNvPicPr>
+          <p:nvPr>
+            <p:ph idx="1"/>
+          </p:nvPr>
+        </p:nvPicPr>
+        <p:blipFill>
+          <a:blip r:embed="rId1"/>
+          <a:stretch>
+            <a:fillRect/>
+          </a:stretch>
+        </p:blipFill>
+        <p:spPr>
+          <a:xfrm>
+            <a:off x="1570355" y="1532890"/>
+            <a:ext cx="8872855" cy="3791585"/>
+          </a:xfrm>
+          <a:prstGeom prst="rect">
+            <a:avLst/>
+          </a:prstGeom>
+        </p:spPr>
+      </p:pic>
+    </p:spTree>
+  </p:cSld>
+  <p:clrMapOvr>
+    <a:masterClrMapping/>
+  </p:clrMapOvr>
+</p:sld>
+</file>
+
+<file path=ppt/slides/slide27.xml><?xml version="1.0" encoding="utf-8"?>
+<p:sld xmlns:a="http://schemas.openxmlformats.org/drawingml/2006/main" xmlns:r="http://schemas.openxmlformats.org/officeDocument/2006/relationships" xmlns:p="http://schemas.openxmlformats.org/presentationml/2006/main">
+  <p:cSld>
+    <p:spTree>
+      <p:nvGrpSpPr>
+        <p:cNvPr id="1" name=""/>
+        <p:cNvGrpSpPr/>
+        <p:nvPr/>
+      </p:nvGrpSpPr>
+      <p:grpSpPr/>
+      <p:sp>
+        <p:nvSpPr>
+          <p:cNvPr id="2" name="Title 1"/>
+          <p:cNvSpPr>
+            <a:spLocks noGrp="1"/>
+          </p:cNvSpPr>
+          <p:nvPr>
+            <p:ph type="title"/>
+          </p:nvPr>
+        </p:nvSpPr>
+        <p:spPr/>
+        <p:txBody>
+          <a:bodyPr/>
+          <a:p>
+            <a:r>
+              <a:rPr lang="en-US" altLang="en-GB" b="1">
+                <a:latin typeface="Times New Roman" panose="02020603050405020304" charset="0"/>
+                <a:cs typeface="Times New Roman" panose="02020603050405020304" charset="0"/>
+                <a:sym typeface="+mn-ea"/>
+              </a:rPr>
+              <a:t>UI Demo Flow </a:t>
+            </a:r>
+            <a:endParaRPr lang="en-GB" altLang="en-US"/>
+          </a:p>
+        </p:txBody>
+      </p:sp>
+      <p:pic>
+        <p:nvPicPr>
+          <p:cNvPr id="4" name="Content Placeholder 3" descr="step-3.2"/>
+          <p:cNvPicPr>
+            <a:picLocks noChangeAspect="1"/>
+          </p:cNvPicPr>
+          <p:nvPr>
+            <p:ph idx="1"/>
+          </p:nvPr>
+        </p:nvPicPr>
+        <p:blipFill>
+          <a:blip r:embed="rId1"/>
+          <a:stretch>
+            <a:fillRect/>
+          </a:stretch>
+        </p:blipFill>
+        <p:spPr>
+          <a:xfrm>
+            <a:off x="1490980" y="1231900"/>
+            <a:ext cx="8794115" cy="4662170"/>
+          </a:xfrm>
+          <a:prstGeom prst="rect">
+            <a:avLst/>
+          </a:prstGeom>
+        </p:spPr>
+      </p:pic>
+    </p:spTree>
+  </p:cSld>
+  <p:clrMapOvr>
+    <a:masterClrMapping/>
+  </p:clrMapOvr>
+</p:sld>
+</file>
+
+<file path=ppt/slides/slide28.xml><?xml version="1.0" encoding="utf-8"?>
+<p:sld xmlns:a="http://schemas.openxmlformats.org/drawingml/2006/main" xmlns:r="http://schemas.openxmlformats.org/officeDocument/2006/relationships" xmlns:p="http://schemas.openxmlformats.org/presentationml/2006/main">
+  <p:cSld>
+    <p:spTree>
+      <p:nvGrpSpPr>
+        <p:cNvPr id="1" name=""/>
+        <p:cNvGrpSpPr/>
+        <p:nvPr/>
+      </p:nvGrpSpPr>
+      <p:grpSpPr/>
+      <p:sp>
+        <p:nvSpPr>
+          <p:cNvPr id="2" name="Title 1"/>
+          <p:cNvSpPr>
+            <a:spLocks noGrp="1"/>
+          </p:cNvSpPr>
+          <p:nvPr>
+            <p:ph type="title"/>
+          </p:nvPr>
+        </p:nvSpPr>
+        <p:spPr/>
+        <p:txBody>
+          <a:bodyPr/>
+          <a:p>
+            <a:r>
+              <a:rPr lang="en-US" altLang="en-GB" b="1">
+                <a:latin typeface="Times New Roman" panose="02020603050405020304" charset="0"/>
+                <a:cs typeface="Times New Roman" panose="02020603050405020304" charset="0"/>
+              </a:rPr>
+              <a:t>Team Contributions</a:t>
+            </a:r>
+            <a:endParaRPr lang="en-US" altLang="en-GB" b="1">
+              <a:latin typeface="Times New Roman" panose="02020603050405020304" charset="0"/>
+              <a:cs typeface="Times New Roman" panose="02020603050405020304" charset="0"/>
+            </a:endParaRPr>
+          </a:p>
+        </p:txBody>
+      </p:sp>
       <p:sp>
         <p:nvSpPr>
           <p:cNvPr id="3" name="Content Placeholder 2"/>
@@ -5227,7 +5611,7 @@
                 <a:latin typeface="Times New Roman" panose="02020603050405020304" charset="0"/>
                 <a:cs typeface="Times New Roman" panose="02020603050405020304" charset="0"/>
               </a:rPr>
-              <a:t>SCI Reflection (Systems &amp; Computational Intelligence):</a:t>
+              <a:t>Amadou Sarjo Jallow</a:t>
             </a:r>
             <a:endParaRPr lang="en-US" altLang="en-GB" b="1">
               <a:latin typeface="Times New Roman" panose="02020603050405020304" charset="0"/>
@@ -5238,64 +5622,167 @@
             <a:pPr marL="0" indent="0">
               <a:buNone/>
             </a:pPr>
-            <a:r>
-              <a:rPr lang="en-GB" altLang="en-US">
-                <a:latin typeface="Times New Roman" panose="02020603050405020304" charset="0"/>
-                <a:cs typeface="Times New Roman" panose="02020603050405020304" charset="0"/>
-              </a:rPr>
-              <a:t> - &gt; TO BE CHANGED</a:t>
-            </a:r>
-            <a:endParaRPr lang="en-US" altLang="en-GB">
-              <a:latin typeface="Times New Roman" panose="02020603050405020304" charset="0"/>
-              <a:cs typeface="Times New Roman" panose="02020603050405020304" charset="0"/>
-            </a:endParaRPr>
-          </a:p>
-          <a:p>
-            <a:r>
-              <a:rPr lang="en-US" altLang="en-GB">
-                <a:latin typeface="Times New Roman" panose="02020603050405020304" charset="0"/>
-                <a:cs typeface="Times New Roman" panose="02020603050405020304" charset="0"/>
-              </a:rPr>
-              <a:t>Applied modular system design using independent agents</a:t>
-            </a:r>
-            <a:endParaRPr lang="en-US" altLang="en-GB">
-              <a:latin typeface="Times New Roman" panose="02020603050405020304" charset="0"/>
-              <a:cs typeface="Times New Roman" panose="02020603050405020304" charset="0"/>
-            </a:endParaRPr>
-          </a:p>
-          <a:p>
-            <a:r>
-              <a:rPr lang="en-US" altLang="en-GB">
-                <a:latin typeface="Times New Roman" panose="02020603050405020304" charset="0"/>
-                <a:cs typeface="Times New Roman" panose="02020603050405020304" charset="0"/>
-              </a:rPr>
-              <a:t>Used orchestration to coordinate complex workflows</a:t>
-            </a:r>
-            <a:endParaRPr lang="en-US" altLang="en-GB">
-              <a:latin typeface="Times New Roman" panose="02020603050405020304" charset="0"/>
-              <a:cs typeface="Times New Roman" panose="02020603050405020304" charset="0"/>
-            </a:endParaRPr>
-          </a:p>
-          <a:p>
-            <a:r>
-              <a:rPr lang="en-US" altLang="en-GB">
-                <a:latin typeface="Times New Roman" panose="02020603050405020304" charset="0"/>
-                <a:cs typeface="Times New Roman" panose="02020603050405020304" charset="0"/>
-              </a:rPr>
-              <a:t>Demonstrated parallel processing with multiple matchers</a:t>
-            </a:r>
-            <a:endParaRPr lang="en-US" altLang="en-GB">
-              <a:latin typeface="Times New Roman" panose="02020603050405020304" charset="0"/>
-              <a:cs typeface="Times New Roman" panose="02020603050405020304" charset="0"/>
-            </a:endParaRPr>
-          </a:p>
-          <a:p>
-            <a:r>
-              <a:rPr lang="en-US" altLang="en-GB">
-                <a:latin typeface="Times New Roman" panose="02020603050405020304" charset="0"/>
-                <a:cs typeface="Times New Roman" panose="02020603050405020304" charset="0"/>
-              </a:rPr>
-              <a:t>Showed how AI can automate real-world decision-making</a:t>
+            <a:endParaRPr lang="en-US" altLang="en-GB">
+              <a:latin typeface="Times New Roman" panose="02020603050405020304" charset="0"/>
+              <a:cs typeface="Times New Roman" panose="02020603050405020304" charset="0"/>
+            </a:endParaRPr>
+          </a:p>
+          <a:p>
+            <a:r>
+              <a:rPr lang="en-US" altLang="en-GB">
+                <a:latin typeface="Times New Roman" panose="02020603050405020304" charset="0"/>
+                <a:cs typeface="Times New Roman" panose="02020603050405020304" charset="0"/>
+              </a:rPr>
+              <a:t>Designed overall system architecture</a:t>
+            </a:r>
+            <a:endParaRPr lang="en-US" altLang="en-GB">
+              <a:latin typeface="Times New Roman" panose="02020603050405020304" charset="0"/>
+              <a:cs typeface="Times New Roman" panose="02020603050405020304" charset="0"/>
+            </a:endParaRPr>
+          </a:p>
+          <a:p>
+            <a:r>
+              <a:rPr lang="en-US" altLang="en-GB">
+                <a:latin typeface="Times New Roman" panose="02020603050405020304" charset="0"/>
+                <a:cs typeface="Times New Roman" panose="02020603050405020304" charset="0"/>
+              </a:rPr>
+              <a:t>Implemented orchestrator and multi-agent workflow</a:t>
+            </a:r>
+            <a:endParaRPr lang="en-US" altLang="en-GB">
+              <a:latin typeface="Times New Roman" panose="02020603050405020304" charset="0"/>
+              <a:cs typeface="Times New Roman" panose="02020603050405020304" charset="0"/>
+            </a:endParaRPr>
+          </a:p>
+          <a:p>
+            <a:r>
+              <a:rPr lang="en-US" altLang="en-GB">
+                <a:latin typeface="Times New Roman" panose="02020603050405020304" charset="0"/>
+                <a:cs typeface="Times New Roman" panose="02020603050405020304" charset="0"/>
+              </a:rPr>
+              <a:t>Built and integrated the Gradio UI</a:t>
+            </a:r>
+            <a:endParaRPr lang="en-US" altLang="en-GB">
+              <a:latin typeface="Times New Roman" panose="02020603050405020304" charset="0"/>
+              <a:cs typeface="Times New Roman" panose="02020603050405020304" charset="0"/>
+            </a:endParaRPr>
+          </a:p>
+        </p:txBody>
+      </p:sp>
+    </p:spTree>
+  </p:cSld>
+  <p:clrMapOvr>
+    <a:masterClrMapping/>
+  </p:clrMapOvr>
+</p:sld>
+</file>
+
+<file path=ppt/slides/slide29.xml><?xml version="1.0" encoding="utf-8"?>
+<p:sld xmlns:a="http://schemas.openxmlformats.org/drawingml/2006/main" xmlns:r="http://schemas.openxmlformats.org/officeDocument/2006/relationships" xmlns:p="http://schemas.openxmlformats.org/presentationml/2006/main">
+  <p:cSld>
+    <p:spTree>
+      <p:nvGrpSpPr>
+        <p:cNvPr id="1" name=""/>
+        <p:cNvGrpSpPr/>
+        <p:nvPr/>
+      </p:nvGrpSpPr>
+      <p:grpSpPr/>
+      <p:sp>
+        <p:nvSpPr>
+          <p:cNvPr id="2" name="Title 1"/>
+          <p:cNvSpPr>
+            <a:spLocks noGrp="1"/>
+          </p:cNvSpPr>
+          <p:nvPr>
+            <p:ph type="title"/>
+          </p:nvPr>
+        </p:nvSpPr>
+        <p:spPr/>
+        <p:txBody>
+          <a:bodyPr/>
+          <a:p>
+            <a:r>
+              <a:rPr lang="en-US" altLang="en-GB" b="1">
+                <a:latin typeface="Times New Roman" panose="02020603050405020304" charset="0"/>
+                <a:cs typeface="Times New Roman" panose="02020603050405020304" charset="0"/>
+                <a:sym typeface="+mn-ea"/>
+              </a:rPr>
+              <a:t>Team Contributions</a:t>
+            </a:r>
+            <a:endParaRPr lang="en-GB" altLang="en-US"/>
+          </a:p>
+        </p:txBody>
+      </p:sp>
+      <p:sp>
+        <p:nvSpPr>
+          <p:cNvPr id="3" name="Content Placeholder 2"/>
+          <p:cNvSpPr>
+            <a:spLocks noGrp="1"/>
+          </p:cNvSpPr>
+          <p:nvPr>
+            <p:ph idx="1"/>
+          </p:nvPr>
+        </p:nvSpPr>
+        <p:spPr/>
+        <p:txBody>
+          <a:bodyPr/>
+          <a:p>
+            <a:pPr marL="0" indent="0">
+              <a:buNone/>
+            </a:pPr>
+            <a:r>
+              <a:rPr lang="en-US" altLang="en-GB" b="1">
+                <a:latin typeface="Times New Roman" panose="02020603050405020304" charset="0"/>
+                <a:cs typeface="Times New Roman" panose="02020603050405020304" charset="0"/>
+              </a:rPr>
+              <a:t>Jones Omoyibo</a:t>
+            </a:r>
+            <a:endParaRPr lang="en-US" altLang="en-GB" b="1">
+              <a:latin typeface="Times New Roman" panose="02020603050405020304" charset="0"/>
+              <a:cs typeface="Times New Roman" panose="02020603050405020304" charset="0"/>
+            </a:endParaRPr>
+          </a:p>
+          <a:p>
+            <a:pPr marL="0" indent="0">
+              <a:buNone/>
+            </a:pPr>
+            <a:endParaRPr lang="en-US" altLang="en-GB">
+              <a:latin typeface="Times New Roman" panose="02020603050405020304" charset="0"/>
+              <a:cs typeface="Times New Roman" panose="02020603050405020304" charset="0"/>
+            </a:endParaRPr>
+          </a:p>
+          <a:p>
+            <a:r>
+              <a:rPr lang="en-US" altLang="en-GB">
+                <a:latin typeface="Times New Roman" panose="02020603050405020304" charset="0"/>
+                <a:cs typeface="Times New Roman" panose="02020603050405020304" charset="0"/>
+              </a:rPr>
+              <a:t>Developed Resume Parser Agent</a:t>
+            </a:r>
+            <a:endParaRPr lang="en-US" altLang="en-GB">
+              <a:latin typeface="Times New Roman" panose="02020603050405020304" charset="0"/>
+              <a:cs typeface="Times New Roman" panose="02020603050405020304" charset="0"/>
+            </a:endParaRPr>
+          </a:p>
+          <a:p>
+            <a:r>
+              <a:rPr lang="en-US" altLang="en-GB">
+                <a:latin typeface="Times New Roman" panose="02020603050405020304" charset="0"/>
+                <a:cs typeface="Times New Roman" panose="02020603050405020304" charset="0"/>
+              </a:rPr>
+              <a:t>Implemented Resume Tailor Agent</a:t>
+            </a:r>
+            <a:endParaRPr lang="en-US" altLang="en-GB">
+              <a:latin typeface="Times New Roman" panose="02020603050405020304" charset="0"/>
+              <a:cs typeface="Times New Roman" panose="02020603050405020304" charset="0"/>
+            </a:endParaRPr>
+          </a:p>
+          <a:p>
+            <a:r>
+              <a:rPr lang="en-US" altLang="en-GB">
+                <a:latin typeface="Times New Roman" panose="02020603050405020304" charset="0"/>
+                <a:cs typeface="Times New Roman" panose="02020603050405020304" charset="0"/>
+              </a:rPr>
+              <a:t>Built Aggregator Agent for result consolidation</a:t>
             </a:r>
             <a:endParaRPr lang="en-US" altLang="en-GB">
               <a:latin typeface="Times New Roman" panose="02020603050405020304" charset="0"/>
@@ -5466,6 +5953,686 @@
 </p:sld>
 </file>
 
+<file path=ppt/slides/slide30.xml><?xml version="1.0" encoding="utf-8"?>
+<p:sld xmlns:a="http://schemas.openxmlformats.org/drawingml/2006/main" xmlns:r="http://schemas.openxmlformats.org/officeDocument/2006/relationships" xmlns:p="http://schemas.openxmlformats.org/presentationml/2006/main">
+  <p:cSld>
+    <p:spTree>
+      <p:nvGrpSpPr>
+        <p:cNvPr id="1" name=""/>
+        <p:cNvGrpSpPr/>
+        <p:nvPr/>
+      </p:nvGrpSpPr>
+      <p:grpSpPr/>
+      <p:sp>
+        <p:nvSpPr>
+          <p:cNvPr id="2" name="Title 1"/>
+          <p:cNvSpPr>
+            <a:spLocks noGrp="1"/>
+          </p:cNvSpPr>
+          <p:nvPr>
+            <p:ph type="title"/>
+          </p:nvPr>
+        </p:nvSpPr>
+        <p:spPr>
+          <a:xfrm>
+            <a:off x="609600" y="190500"/>
+            <a:ext cx="10972800" cy="582613"/>
+          </a:xfrm>
+        </p:spPr>
+        <p:txBody>
+          <a:bodyPr/>
+          <a:p>
+            <a:r>
+              <a:rPr lang="en-US" altLang="en-GB" b="1">
+                <a:latin typeface="Times New Roman" panose="02020603050405020304" charset="0"/>
+                <a:cs typeface="Times New Roman" panose="02020603050405020304" charset="0"/>
+                <a:sym typeface="+mn-ea"/>
+              </a:rPr>
+              <a:t>Team Contributions</a:t>
+            </a:r>
+            <a:endParaRPr lang="en-GB" altLang="en-US"/>
+          </a:p>
+        </p:txBody>
+      </p:sp>
+      <p:sp>
+        <p:nvSpPr>
+          <p:cNvPr id="3" name="Content Placeholder 2"/>
+          <p:cNvSpPr>
+            <a:spLocks noGrp="1"/>
+          </p:cNvSpPr>
+          <p:nvPr>
+            <p:ph idx="1"/>
+          </p:nvPr>
+        </p:nvSpPr>
+        <p:spPr/>
+        <p:txBody>
+          <a:bodyPr/>
+          <a:p>
+            <a:pPr marL="0" indent="0">
+              <a:buNone/>
+            </a:pPr>
+            <a:r>
+              <a:rPr lang="en-US" altLang="en-GB" b="1">
+                <a:latin typeface="Times New Roman" panose="02020603050405020304" charset="0"/>
+                <a:cs typeface="Times New Roman" panose="02020603050405020304" charset="0"/>
+              </a:rPr>
+              <a:t>Williams Afotey Botchway</a:t>
+            </a:r>
+            <a:endParaRPr lang="en-US" altLang="en-GB" b="1">
+              <a:latin typeface="Times New Roman" panose="02020603050405020304" charset="0"/>
+              <a:cs typeface="Times New Roman" panose="02020603050405020304" charset="0"/>
+            </a:endParaRPr>
+          </a:p>
+          <a:p>
+            <a:pPr marL="0" indent="0">
+              <a:buNone/>
+            </a:pPr>
+            <a:endParaRPr lang="en-US" altLang="en-GB">
+              <a:latin typeface="Times New Roman" panose="02020603050405020304" charset="0"/>
+              <a:cs typeface="Times New Roman" panose="02020603050405020304" charset="0"/>
+            </a:endParaRPr>
+          </a:p>
+          <a:p>
+            <a:r>
+              <a:rPr lang="en-US" altLang="en-GB">
+                <a:latin typeface="Times New Roman" panose="02020603050405020304" charset="0"/>
+                <a:cs typeface="Times New Roman" panose="02020603050405020304" charset="0"/>
+              </a:rPr>
+              <a:t>Developed Remotive Matcher Agent</a:t>
+            </a:r>
+            <a:endParaRPr lang="en-US" altLang="en-GB">
+              <a:latin typeface="Times New Roman" panose="02020603050405020304" charset="0"/>
+              <a:cs typeface="Times New Roman" panose="02020603050405020304" charset="0"/>
+            </a:endParaRPr>
+          </a:p>
+          <a:p>
+            <a:r>
+              <a:rPr lang="en-US" altLang="en-GB">
+                <a:latin typeface="Times New Roman" panose="02020603050405020304" charset="0"/>
+                <a:cs typeface="Times New Roman" panose="02020603050405020304" charset="0"/>
+              </a:rPr>
+              <a:t>Developed Arbeitnow Matcher Agent</a:t>
+            </a:r>
+            <a:endParaRPr lang="en-US" altLang="en-GB">
+              <a:latin typeface="Times New Roman" panose="02020603050405020304" charset="0"/>
+              <a:cs typeface="Times New Roman" panose="02020603050405020304" charset="0"/>
+            </a:endParaRPr>
+          </a:p>
+          <a:p>
+            <a:r>
+              <a:rPr lang="en-US" altLang="en-GB">
+                <a:latin typeface="Times New Roman" panose="02020603050405020304" charset="0"/>
+                <a:cs typeface="Times New Roman" panose="02020603050405020304" charset="0"/>
+              </a:rPr>
+              <a:t>Implemented API function tools for job fetching and integration</a:t>
+            </a:r>
+            <a:endParaRPr lang="en-US" altLang="en-GB">
+              <a:latin typeface="Times New Roman" panose="02020603050405020304" charset="0"/>
+              <a:cs typeface="Times New Roman" panose="02020603050405020304" charset="0"/>
+            </a:endParaRPr>
+          </a:p>
+        </p:txBody>
+      </p:sp>
+    </p:spTree>
+  </p:cSld>
+  <p:clrMapOvr>
+    <a:masterClrMapping/>
+  </p:clrMapOvr>
+</p:sld>
+</file>
+
+<file path=ppt/slides/slide31.xml><?xml version="1.0" encoding="utf-8"?>
+<p:sld xmlns:a="http://schemas.openxmlformats.org/drawingml/2006/main" xmlns:r="http://schemas.openxmlformats.org/officeDocument/2006/relationships" xmlns:p="http://schemas.openxmlformats.org/presentationml/2006/main">
+  <p:cSld>
+    <p:spTree>
+      <p:nvGrpSpPr>
+        <p:cNvPr id="1" name=""/>
+        <p:cNvGrpSpPr/>
+        <p:nvPr/>
+      </p:nvGrpSpPr>
+      <p:grpSpPr/>
+      <p:sp>
+        <p:nvSpPr>
+          <p:cNvPr id="2" name="Title 1"/>
+          <p:cNvSpPr>
+            <a:spLocks noGrp="1"/>
+          </p:cNvSpPr>
+          <p:nvPr>
+            <p:ph type="title"/>
+          </p:nvPr>
+        </p:nvSpPr>
+        <p:spPr/>
+        <p:txBody>
+          <a:bodyPr/>
+          <a:p>
+            <a:r>
+              <a:rPr lang="en-US" altLang="en-GB" b="1">
+                <a:latin typeface="Times New Roman" panose="02020603050405020304" charset="0"/>
+                <a:cs typeface="Times New Roman" panose="02020603050405020304" charset="0"/>
+              </a:rPr>
+              <a:t>GitHub Repository</a:t>
+            </a:r>
+            <a:endParaRPr lang="en-US" altLang="en-GB" b="1">
+              <a:latin typeface="Times New Roman" panose="02020603050405020304" charset="0"/>
+              <a:cs typeface="Times New Roman" panose="02020603050405020304" charset="0"/>
+            </a:endParaRPr>
+          </a:p>
+        </p:txBody>
+      </p:sp>
+      <p:sp>
+        <p:nvSpPr>
+          <p:cNvPr id="3" name="Content Placeholder 2"/>
+          <p:cNvSpPr>
+            <a:spLocks noGrp="1"/>
+          </p:cNvSpPr>
+          <p:nvPr>
+            <p:ph idx="1"/>
+          </p:nvPr>
+        </p:nvSpPr>
+        <p:spPr/>
+        <p:txBody>
+          <a:bodyPr/>
+          <a:p>
+            <a:pPr marL="0" indent="0">
+              <a:buNone/>
+            </a:pPr>
+            <a:r>
+              <a:rPr lang="en-US" altLang="en-GB" b="1">
+                <a:latin typeface="Times New Roman" panose="02020603050405020304" charset="0"/>
+                <a:cs typeface="Times New Roman" panose="02020603050405020304" charset="0"/>
+              </a:rPr>
+              <a:t>Repository Link</a:t>
+            </a:r>
+            <a:r>
+              <a:rPr lang="en-US" altLang="en-GB">
+                <a:latin typeface="Times New Roman" panose="02020603050405020304" charset="0"/>
+                <a:cs typeface="Times New Roman" panose="02020603050405020304" charset="0"/>
+              </a:rPr>
+              <a:t>:</a:t>
+            </a:r>
+            <a:endParaRPr lang="en-US" altLang="en-GB">
+              <a:latin typeface="Times New Roman" panose="02020603050405020304" charset="0"/>
+              <a:cs typeface="Times New Roman" panose="02020603050405020304" charset="0"/>
+            </a:endParaRPr>
+          </a:p>
+          <a:p>
+            <a:pPr marL="0" indent="0">
+              <a:buNone/>
+            </a:pPr>
+            <a:r>
+              <a:rPr lang="en-US" altLang="en-GB">
+                <a:latin typeface="Times New Roman" panose="02020603050405020304" charset="0"/>
+                <a:cs typeface="Times New Roman" panose="02020603050405020304" charset="0"/>
+              </a:rPr>
+              <a:t>https://github.com/AMS-JR/ai-career-assistant</a:t>
+            </a:r>
+            <a:endParaRPr lang="en-US" altLang="en-GB">
+              <a:latin typeface="Times New Roman" panose="02020603050405020304" charset="0"/>
+              <a:cs typeface="Times New Roman" panose="02020603050405020304" charset="0"/>
+            </a:endParaRPr>
+          </a:p>
+          <a:p>
+            <a:pPr marL="0" indent="0">
+              <a:buNone/>
+            </a:pPr>
+            <a:endParaRPr lang="en-US" altLang="en-GB">
+              <a:latin typeface="Times New Roman" panose="02020603050405020304" charset="0"/>
+              <a:cs typeface="Times New Roman" panose="02020603050405020304" charset="0"/>
+            </a:endParaRPr>
+          </a:p>
+          <a:p>
+            <a:pPr marL="0" indent="0">
+              <a:buNone/>
+            </a:pPr>
+            <a:r>
+              <a:rPr lang="en-US" altLang="en-GB" b="1">
+                <a:latin typeface="Times New Roman" panose="02020603050405020304" charset="0"/>
+                <a:cs typeface="Times New Roman" panose="02020603050405020304" charset="0"/>
+              </a:rPr>
+              <a:t>Includes</a:t>
+            </a:r>
+            <a:r>
+              <a:rPr lang="en-US" altLang="en-GB">
+                <a:latin typeface="Times New Roman" panose="02020603050405020304" charset="0"/>
+                <a:cs typeface="Times New Roman" panose="02020603050405020304" charset="0"/>
+              </a:rPr>
+              <a:t>:</a:t>
+            </a:r>
+            <a:endParaRPr lang="en-US" altLang="en-GB">
+              <a:latin typeface="Times New Roman" panose="02020603050405020304" charset="0"/>
+              <a:cs typeface="Times New Roman" panose="02020603050405020304" charset="0"/>
+            </a:endParaRPr>
+          </a:p>
+          <a:p>
+            <a:pPr marL="0" indent="0">
+              <a:buNone/>
+            </a:pPr>
+            <a:endParaRPr lang="en-US" altLang="en-GB">
+              <a:latin typeface="Times New Roman" panose="02020603050405020304" charset="0"/>
+              <a:cs typeface="Times New Roman" panose="02020603050405020304" charset="0"/>
+            </a:endParaRPr>
+          </a:p>
+          <a:p>
+            <a:r>
+              <a:rPr lang="en-US" altLang="en-GB">
+                <a:latin typeface="Times New Roman" panose="02020603050405020304" charset="0"/>
+                <a:cs typeface="Times New Roman" panose="02020603050405020304" charset="0"/>
+              </a:rPr>
+              <a:t>Full source code</a:t>
+            </a:r>
+            <a:endParaRPr lang="en-US" altLang="en-GB">
+              <a:latin typeface="Times New Roman" panose="02020603050405020304" charset="0"/>
+              <a:cs typeface="Times New Roman" panose="02020603050405020304" charset="0"/>
+            </a:endParaRPr>
+          </a:p>
+          <a:p>
+            <a:r>
+              <a:rPr lang="en-US" altLang="en-GB">
+                <a:latin typeface="Times New Roman" panose="02020603050405020304" charset="0"/>
+                <a:cs typeface="Times New Roman" panose="02020603050405020304" charset="0"/>
+              </a:rPr>
+              <a:t>Agent implementations</a:t>
+            </a:r>
+            <a:endParaRPr lang="en-US" altLang="en-GB">
+              <a:latin typeface="Times New Roman" panose="02020603050405020304" charset="0"/>
+              <a:cs typeface="Times New Roman" panose="02020603050405020304" charset="0"/>
+            </a:endParaRPr>
+          </a:p>
+          <a:p>
+            <a:r>
+              <a:rPr lang="en-US" altLang="en-GB">
+                <a:latin typeface="Times New Roman" panose="02020603050405020304" charset="0"/>
+                <a:cs typeface="Times New Roman" panose="02020603050405020304" charset="0"/>
+              </a:rPr>
+              <a:t>API integrations</a:t>
+            </a:r>
+            <a:endParaRPr lang="en-US" altLang="en-GB">
+              <a:latin typeface="Times New Roman" panose="02020603050405020304" charset="0"/>
+              <a:cs typeface="Times New Roman" panose="02020603050405020304" charset="0"/>
+            </a:endParaRPr>
+          </a:p>
+          <a:p>
+            <a:r>
+              <a:rPr lang="en-US" altLang="en-GB">
+                <a:latin typeface="Times New Roman" panose="02020603050405020304" charset="0"/>
+                <a:cs typeface="Times New Roman" panose="02020603050405020304" charset="0"/>
+              </a:rPr>
+              <a:t>UI (Gradio)</a:t>
+            </a:r>
+            <a:endParaRPr lang="en-US" altLang="en-GB">
+              <a:latin typeface="Times New Roman" panose="02020603050405020304" charset="0"/>
+              <a:cs typeface="Times New Roman" panose="02020603050405020304" charset="0"/>
+            </a:endParaRPr>
+          </a:p>
+        </p:txBody>
+      </p:sp>
+      <p:sp>
+        <p:nvSpPr>
+          <p:cNvPr id="4" name="Text Box 3"/>
+          <p:cNvSpPr txBox="1"/>
+          <p:nvPr/>
+        </p:nvSpPr>
+        <p:spPr>
+          <a:xfrm>
+            <a:off x="3556000" y="3260408"/>
+            <a:ext cx="5080000" cy="337185"/>
+          </a:xfrm>
+          <a:prstGeom prst="rect">
+            <a:avLst/>
+          </a:prstGeom>
+        </p:spPr>
+        <p:txBody>
+          <a:bodyPr>
+            <a:spAutoFit/>
+          </a:bodyPr>
+          <a:p>
+            <a:r>
+              <a:rPr sz="1600"/>
+              <a:t>GitHub Repository</a:t>
+            </a:r>
+            <a:endParaRPr sz="1600"/>
+          </a:p>
+        </p:txBody>
+      </p:sp>
+    </p:spTree>
+  </p:cSld>
+  <p:clrMapOvr>
+    <a:masterClrMapping/>
+  </p:clrMapOvr>
+</p:sld>
+</file>
+
+<file path=ppt/slides/slide32.xml><?xml version="1.0" encoding="utf-8"?>
+<p:sld xmlns:a="http://schemas.openxmlformats.org/drawingml/2006/main" xmlns:r="http://schemas.openxmlformats.org/officeDocument/2006/relationships" xmlns:p="http://schemas.openxmlformats.org/presentationml/2006/main">
+  <p:cSld>
+    <p:spTree>
+      <p:nvGrpSpPr>
+        <p:cNvPr id="1" name=""/>
+        <p:cNvGrpSpPr/>
+        <p:nvPr/>
+      </p:nvGrpSpPr>
+      <p:grpSpPr/>
+      <p:sp>
+        <p:nvSpPr>
+          <p:cNvPr id="2" name="Title 1"/>
+          <p:cNvSpPr>
+            <a:spLocks noGrp="1"/>
+          </p:cNvSpPr>
+          <p:nvPr>
+            <p:ph type="title"/>
+          </p:nvPr>
+        </p:nvSpPr>
+        <p:spPr/>
+        <p:txBody>
+          <a:bodyPr/>
+          <a:p>
+            <a:r>
+              <a:rPr lang="en-US" altLang="en-GB" b="1">
+                <a:latin typeface="Times New Roman" panose="02020603050405020304" charset="0"/>
+                <a:cs typeface="Times New Roman" panose="02020603050405020304" charset="0"/>
+              </a:rPr>
+              <a:t>Conclusion &amp; SCI Reflection</a:t>
+            </a:r>
+            <a:endParaRPr lang="en-US" altLang="en-GB" b="1">
+              <a:latin typeface="Times New Roman" panose="02020603050405020304" charset="0"/>
+              <a:cs typeface="Times New Roman" panose="02020603050405020304" charset="0"/>
+            </a:endParaRPr>
+          </a:p>
+        </p:txBody>
+      </p:sp>
+      <p:sp>
+        <p:nvSpPr>
+          <p:cNvPr id="3" name="Content Placeholder 2"/>
+          <p:cNvSpPr>
+            <a:spLocks noGrp="1"/>
+          </p:cNvSpPr>
+          <p:nvPr>
+            <p:ph idx="1"/>
+          </p:nvPr>
+        </p:nvSpPr>
+        <p:spPr/>
+        <p:txBody>
+          <a:bodyPr/>
+          <a:p>
+            <a:pPr marL="0" indent="0">
+              <a:buNone/>
+            </a:pPr>
+            <a:r>
+              <a:rPr lang="en-US" altLang="en-GB" b="1">
+                <a:latin typeface="Times New Roman" panose="02020603050405020304" charset="0"/>
+                <a:cs typeface="Times New Roman" panose="02020603050405020304" charset="0"/>
+              </a:rPr>
+              <a:t>Conclusion</a:t>
+            </a:r>
+            <a:r>
+              <a:rPr lang="en-US" altLang="en-GB">
+                <a:latin typeface="Times New Roman" panose="02020603050405020304" charset="0"/>
+                <a:cs typeface="Times New Roman" panose="02020603050405020304" charset="0"/>
+              </a:rPr>
+              <a:t>:</a:t>
+            </a:r>
+            <a:endParaRPr lang="en-US" altLang="en-GB">
+              <a:latin typeface="Times New Roman" panose="02020603050405020304" charset="0"/>
+              <a:cs typeface="Times New Roman" panose="02020603050405020304" charset="0"/>
+            </a:endParaRPr>
+          </a:p>
+          <a:p>
+            <a:pPr marL="0" indent="0">
+              <a:buNone/>
+            </a:pPr>
+            <a:endParaRPr lang="en-US" altLang="en-GB">
+              <a:latin typeface="Times New Roman" panose="02020603050405020304" charset="0"/>
+              <a:cs typeface="Times New Roman" panose="02020603050405020304" charset="0"/>
+            </a:endParaRPr>
+          </a:p>
+          <a:p>
+            <a:r>
+              <a:rPr lang="en-US" altLang="en-GB">
+                <a:latin typeface="Times New Roman" panose="02020603050405020304" charset="0"/>
+                <a:cs typeface="Times New Roman" panose="02020603050405020304" charset="0"/>
+              </a:rPr>
+              <a:t>Successfully built a scalable AI-driven job matching system</a:t>
+            </a:r>
+            <a:endParaRPr lang="en-US" altLang="en-GB">
+              <a:latin typeface="Times New Roman" panose="02020603050405020304" charset="0"/>
+              <a:cs typeface="Times New Roman" panose="02020603050405020304" charset="0"/>
+            </a:endParaRPr>
+          </a:p>
+          <a:p>
+            <a:r>
+              <a:rPr lang="en-US" altLang="en-GB">
+                <a:latin typeface="Times New Roman" panose="02020603050405020304" charset="0"/>
+                <a:cs typeface="Times New Roman" panose="02020603050405020304" charset="0"/>
+              </a:rPr>
+              <a:t>Demonstrated the power of multi-agent architectures</a:t>
+            </a:r>
+            <a:endParaRPr lang="en-US" altLang="en-GB">
+              <a:latin typeface="Times New Roman" panose="02020603050405020304" charset="0"/>
+              <a:cs typeface="Times New Roman" panose="02020603050405020304" charset="0"/>
+            </a:endParaRPr>
+          </a:p>
+          <a:p>
+            <a:r>
+              <a:rPr lang="en-US" altLang="en-GB">
+                <a:latin typeface="Times New Roman" panose="02020603050405020304" charset="0"/>
+                <a:cs typeface="Times New Roman" panose="02020603050405020304" charset="0"/>
+              </a:rPr>
+              <a:t>Improved efficiency of job searching and resume customization</a:t>
+            </a:r>
+            <a:endParaRPr lang="en-US" altLang="en-GB">
+              <a:latin typeface="Times New Roman" panose="02020603050405020304" charset="0"/>
+              <a:cs typeface="Times New Roman" panose="02020603050405020304" charset="0"/>
+            </a:endParaRPr>
+          </a:p>
+        </p:txBody>
+      </p:sp>
+    </p:spTree>
+  </p:cSld>
+  <p:clrMapOvr>
+    <a:masterClrMapping/>
+  </p:clrMapOvr>
+</p:sld>
+</file>
+
+<file path=ppt/slides/slide33.xml><?xml version="1.0" encoding="utf-8"?>
+<p:sld xmlns:a="http://schemas.openxmlformats.org/drawingml/2006/main" xmlns:r="http://schemas.openxmlformats.org/officeDocument/2006/relationships" xmlns:p="http://schemas.openxmlformats.org/presentationml/2006/main">
+  <p:cSld>
+    <p:spTree>
+      <p:nvGrpSpPr>
+        <p:cNvPr id="1" name=""/>
+        <p:cNvGrpSpPr/>
+        <p:nvPr/>
+      </p:nvGrpSpPr>
+      <p:grpSpPr/>
+      <p:sp>
+        <p:nvSpPr>
+          <p:cNvPr id="2" name="Title 1"/>
+          <p:cNvSpPr>
+            <a:spLocks noGrp="1"/>
+          </p:cNvSpPr>
+          <p:nvPr>
+            <p:ph type="title"/>
+          </p:nvPr>
+        </p:nvSpPr>
+        <p:spPr/>
+        <p:txBody>
+          <a:bodyPr/>
+          <a:p>
+            <a:r>
+              <a:rPr lang="en-US" altLang="en-GB" b="1">
+                <a:latin typeface="Times New Roman" panose="02020603050405020304" charset="0"/>
+                <a:cs typeface="Times New Roman" panose="02020603050405020304" charset="0"/>
+                <a:sym typeface="+mn-ea"/>
+              </a:rPr>
+              <a:t>Conclusion &amp; SCI Reflection</a:t>
+            </a:r>
+            <a:endParaRPr lang="en-GB" altLang="en-US"/>
+          </a:p>
+        </p:txBody>
+      </p:sp>
+      <p:sp>
+        <p:nvSpPr>
+          <p:cNvPr id="3" name="Content Placeholder 2"/>
+          <p:cNvSpPr>
+            <a:spLocks noGrp="1"/>
+          </p:cNvSpPr>
+          <p:nvPr>
+            <p:ph idx="1"/>
+          </p:nvPr>
+        </p:nvSpPr>
+        <p:spPr/>
+        <p:txBody>
+          <a:bodyPr/>
+          <a:p>
+            <a:pPr marL="0" indent="0">
+              <a:buNone/>
+            </a:pPr>
+            <a:r>
+              <a:rPr lang="en-US" altLang="en-GB" b="1">
+                <a:latin typeface="Times New Roman" panose="02020603050405020304" charset="0"/>
+                <a:cs typeface="Times New Roman" panose="02020603050405020304" charset="0"/>
+              </a:rPr>
+              <a:t>SCI Reflection (Systems &amp; Computational Intelligence):</a:t>
+            </a:r>
+            <a:endParaRPr lang="en-US" altLang="en-GB" b="1">
+              <a:latin typeface="Times New Roman" panose="02020603050405020304" charset="0"/>
+              <a:cs typeface="Times New Roman" panose="02020603050405020304" charset="0"/>
+            </a:endParaRPr>
+          </a:p>
+          <a:p>
+            <a:pPr marL="0" indent="0">
+              <a:buNone/>
+            </a:pPr>
+            <a:endParaRPr lang="en-US" altLang="en-GB" b="1">
+              <a:latin typeface="Times New Roman" panose="02020603050405020304" charset="0"/>
+              <a:cs typeface="Times New Roman" panose="02020603050405020304" charset="0"/>
+            </a:endParaRPr>
+          </a:p>
+          <a:p>
+            <a:r>
+              <a:rPr lang="en-US" altLang="en-GB" sz="3200">
+                <a:latin typeface="Times New Roman" panose="02020603050405020304" charset="0"/>
+                <a:cs typeface="Times New Roman" panose="02020603050405020304" charset="0"/>
+                <a:sym typeface="+mn-ea"/>
+              </a:rPr>
+              <a:t>The Orchestrator represents a form of centralized control, similar to principles in control systems, where a central mechanism coordinates all components to achieve a goal.</a:t>
+            </a:r>
+            <a:endParaRPr lang="en-US" altLang="en-GB" sz="3200">
+              <a:latin typeface="Times New Roman" panose="02020603050405020304" charset="0"/>
+              <a:cs typeface="Times New Roman" panose="02020603050405020304" charset="0"/>
+            </a:endParaRPr>
+          </a:p>
+          <a:p>
+            <a:pPr lvl="1"/>
+            <a:r>
+              <a:rPr lang="en-US" altLang="en-GB" sz="3200">
+                <a:latin typeface="Times New Roman" panose="02020603050405020304" charset="0"/>
+                <a:cs typeface="Times New Roman" panose="02020603050405020304" charset="0"/>
+                <a:sym typeface="+mn-ea"/>
+              </a:rPr>
+              <a:t>This aligns with SCI’s idea that a unified intelligence coordinates different parts of a system to function harmoniou</a:t>
+            </a:r>
+            <a:endParaRPr lang="en-US" altLang="en-GB">
+              <a:latin typeface="Times New Roman" panose="02020603050405020304" charset="0"/>
+              <a:cs typeface="Times New Roman" panose="02020603050405020304" charset="0"/>
+            </a:endParaRPr>
+          </a:p>
+        </p:txBody>
+      </p:sp>
+    </p:spTree>
+  </p:cSld>
+  <p:clrMapOvr>
+    <a:masterClrMapping/>
+  </p:clrMapOvr>
+</p:sld>
+</file>
+
+<file path=ppt/slides/slide34.xml><?xml version="1.0" encoding="utf-8"?>
+<p:sld xmlns:a="http://schemas.openxmlformats.org/drawingml/2006/main" xmlns:r="http://schemas.openxmlformats.org/officeDocument/2006/relationships" xmlns:p="http://schemas.openxmlformats.org/presentationml/2006/main">
+  <p:cSld>
+    <p:spTree>
+      <p:nvGrpSpPr>
+        <p:cNvPr id="1" name=""/>
+        <p:cNvGrpSpPr/>
+        <p:nvPr/>
+      </p:nvGrpSpPr>
+      <p:grpSpPr/>
+      <p:sp>
+        <p:nvSpPr>
+          <p:cNvPr id="2" name="Title 1"/>
+          <p:cNvSpPr>
+            <a:spLocks noGrp="1"/>
+          </p:cNvSpPr>
+          <p:nvPr>
+            <p:ph type="title"/>
+          </p:nvPr>
+        </p:nvSpPr>
+        <p:spPr/>
+        <p:txBody>
+          <a:bodyPr/>
+          <a:p>
+            <a:r>
+              <a:rPr lang="en-US" altLang="en-GB" b="1">
+                <a:latin typeface="Times New Roman" panose="02020603050405020304" charset="0"/>
+                <a:cs typeface="Times New Roman" panose="02020603050405020304" charset="0"/>
+                <a:sym typeface="+mn-ea"/>
+              </a:rPr>
+              <a:t>Conclusion &amp; SCI Reflection</a:t>
+            </a:r>
+            <a:endParaRPr lang="en-GB" altLang="en-US"/>
+          </a:p>
+        </p:txBody>
+      </p:sp>
+      <p:sp>
+        <p:nvSpPr>
+          <p:cNvPr id="3" name="Content Placeholder 2"/>
+          <p:cNvSpPr>
+            <a:spLocks noGrp="1"/>
+          </p:cNvSpPr>
+          <p:nvPr>
+            <p:ph idx="1"/>
+          </p:nvPr>
+        </p:nvSpPr>
+        <p:spPr/>
+        <p:txBody>
+          <a:bodyPr/>
+          <a:p>
+            <a:r>
+              <a:rPr lang="en-US" altLang="en-GB">
+                <a:latin typeface="Times New Roman" panose="02020603050405020304" charset="0"/>
+                <a:cs typeface="Times New Roman" panose="02020603050405020304" charset="0"/>
+              </a:rPr>
+              <a:t>The use of multiple agents demonstrates distributed intelligence, where each agent performs a specialized role.</a:t>
+            </a:r>
+            <a:endParaRPr lang="en-US" altLang="en-GB">
+              <a:latin typeface="Times New Roman" panose="02020603050405020304" charset="0"/>
+              <a:cs typeface="Times New Roman" panose="02020603050405020304" charset="0"/>
+            </a:endParaRPr>
+          </a:p>
+          <a:p>
+            <a:pPr lvl="1"/>
+            <a:r>
+              <a:rPr lang="en-US" altLang="en-GB">
+                <a:latin typeface="Times New Roman" panose="02020603050405020304" charset="0"/>
+                <a:cs typeface="Times New Roman" panose="02020603050405020304" charset="0"/>
+              </a:rPr>
+              <a:t>This reflects the SCI concept that intelligence is expressed through different components, but originates from a deeper unified structure.</a:t>
+            </a:r>
+            <a:endParaRPr lang="en-US" altLang="en-GB">
+              <a:latin typeface="Times New Roman" panose="02020603050405020304" charset="0"/>
+              <a:cs typeface="Times New Roman" panose="02020603050405020304" charset="0"/>
+            </a:endParaRPr>
+          </a:p>
+        </p:txBody>
+      </p:sp>
+    </p:spTree>
+  </p:cSld>
+  <p:clrMapOvr>
+    <a:masterClrMapping/>
+  </p:clrMapOvr>
+</p:sld>
+</file>
+
 <file path=ppt/slides/slide4.xml><?xml version="1.0" encoding="utf-8"?>
 <p:sld xmlns:a="http://schemas.openxmlformats.org/drawingml/2006/main" xmlns:r="http://schemas.openxmlformats.org/officeDocument/2006/relationships" xmlns:p="http://schemas.openxmlformats.org/presentationml/2006/main">
   <p:cSld>
@@ -5861,7 +7028,12 @@
             <p:ph type="title"/>
           </p:nvPr>
         </p:nvSpPr>
-        <p:spPr/>
+        <p:spPr>
+          <a:xfrm>
+            <a:off x="609600" y="0"/>
+            <a:ext cx="10972800" cy="582613"/>
+          </a:xfrm>
+        </p:spPr>
         <p:txBody>
           <a:bodyPr/>
           <a:p>
@@ -5889,7 +7061,12 @@
             <p:ph idx="1"/>
           </p:nvPr>
         </p:nvSpPr>
-        <p:spPr/>
+        <p:spPr>
+          <a:xfrm>
+            <a:off x="609600" y="582295"/>
+            <a:ext cx="10972800" cy="6275705"/>
+          </a:xfrm>
+        </p:spPr>
         <p:txBody>
           <a:bodyPr/>
           <a:p>
@@ -5897,20 +7074,20 @@
               <a:buNone/>
             </a:pPr>
             <a:r>
-              <a:rPr lang="en-US" altLang="en-GB">
+              <a:rPr lang="en-US" altLang="en-GB" b="1">
                 <a:latin typeface="Times New Roman" panose="02020603050405020304" charset="0"/>
                 <a:cs typeface="Times New Roman" panose="02020603050405020304" charset="0"/>
               </a:rPr>
               <a:t>Pipeline Overview:</a:t>
             </a:r>
             <a:r>
-              <a:rPr lang="en-GB" altLang="en-US">
-                <a:latin typeface="Times New Roman" panose="02020603050405020304" charset="0"/>
-                <a:cs typeface="Times New Roman" panose="02020603050405020304" charset="0"/>
-              </a:rPr>
-              <a:t> TO BE REMOVED</a:t>
-            </a:r>
-            <a:endParaRPr lang="en-US" altLang="en-GB">
+              <a:rPr lang="en-GB" altLang="en-US" b="1">
+                <a:latin typeface="Times New Roman" panose="02020603050405020304" charset="0"/>
+                <a:cs typeface="Times New Roman" panose="02020603050405020304" charset="0"/>
+              </a:rPr>
+              <a:t> </a:t>
+            </a:r>
+            <a:endParaRPr lang="en-US" altLang="en-GB" b="1">
               <a:latin typeface="Times New Roman" panose="02020603050405020304" charset="0"/>
               <a:cs typeface="Times New Roman" panose="02020603050405020304" charset="0"/>
             </a:endParaRPr>
@@ -5919,240 +7096,37 @@
             <a:pPr marL="0" indent="0">
               <a:buNone/>
             </a:pPr>
-            <a:r>
-              <a:rPr lang="en-US" altLang="en-GB" sz="1800">
-                <a:latin typeface="Times New Roman" panose="02020603050405020304" charset="0"/>
-                <a:cs typeface="Times New Roman" panose="02020603050405020304" charset="0"/>
-              </a:rPr>
-              <a:t>Resume </a:t>
-            </a:r>
-            <a:r>
-              <a:rPr lang="en-US" altLang="en-US" sz="1800">
-                <a:latin typeface="Times New Roman" panose="02020603050405020304" charset="0"/>
-                <a:cs typeface="Times New Roman" panose="02020603050405020304" charset="0"/>
-              </a:rPr>
-              <a:t>→</a:t>
-            </a:r>
-            <a:r>
-              <a:rPr lang="en-US" altLang="en-GB" sz="1800">
-                <a:latin typeface="Times New Roman" panose="02020603050405020304" charset="0"/>
-                <a:cs typeface="Times New Roman" panose="02020603050405020304" charset="0"/>
-              </a:rPr>
-              <a:t> Parser Agent </a:t>
-            </a:r>
-            <a:r>
-              <a:rPr lang="en-US" altLang="en-US" sz="1800">
-                <a:latin typeface="Times New Roman" panose="02020603050405020304" charset="0"/>
-                <a:cs typeface="Times New Roman" panose="02020603050405020304" charset="0"/>
-              </a:rPr>
-              <a:t>→</a:t>
-            </a:r>
-            <a:r>
-              <a:rPr lang="en-US" altLang="en-GB" sz="1800">
-                <a:latin typeface="Times New Roman" panose="02020603050405020304" charset="0"/>
-                <a:cs typeface="Times New Roman" panose="02020603050405020304" charset="0"/>
-              </a:rPr>
-              <a:t> Profile JSON</a:t>
-            </a:r>
-            <a:endParaRPr lang="en-US" altLang="en-GB" sz="1800">
-              <a:latin typeface="Times New Roman" panose="02020603050405020304" charset="0"/>
-              <a:cs typeface="Times New Roman" panose="02020603050405020304" charset="0"/>
-            </a:endParaRPr>
-          </a:p>
-          <a:p>
-            <a:pPr marL="0" indent="0">
-              <a:buNone/>
-            </a:pPr>
-            <a:r>
-              <a:rPr lang="en-US" altLang="en-US" sz="1800">
-                <a:latin typeface="Times New Roman" panose="02020603050405020304" charset="0"/>
-                <a:cs typeface="Times New Roman" panose="02020603050405020304" charset="0"/>
-              </a:rPr>
-              <a:t>↓</a:t>
-            </a:r>
-            <a:endParaRPr lang="en-US" altLang="en-US" sz="1800">
-              <a:latin typeface="Times New Roman" panose="02020603050405020304" charset="0"/>
-              <a:cs typeface="Times New Roman" panose="02020603050405020304" charset="0"/>
-            </a:endParaRPr>
-          </a:p>
-          <a:p>
-            <a:pPr marL="0" indent="0">
-              <a:buNone/>
-            </a:pPr>
-            <a:r>
-              <a:rPr lang="en-US" altLang="en-GB" sz="1800">
-                <a:latin typeface="Times New Roman" panose="02020603050405020304" charset="0"/>
-                <a:cs typeface="Times New Roman" panose="02020603050405020304" charset="0"/>
-              </a:rPr>
-              <a:t>Orchestrator Agent</a:t>
-            </a:r>
-            <a:endParaRPr lang="en-US" altLang="en-GB" sz="1800">
-              <a:latin typeface="Times New Roman" panose="02020603050405020304" charset="0"/>
-              <a:cs typeface="Times New Roman" panose="02020603050405020304" charset="0"/>
-            </a:endParaRPr>
-          </a:p>
-          <a:p>
-            <a:pPr marL="0" indent="0">
-              <a:buNone/>
-            </a:pPr>
-            <a:r>
-              <a:rPr lang="en-US" altLang="en-US" sz="1800">
-                <a:latin typeface="Times New Roman" panose="02020603050405020304" charset="0"/>
-                <a:cs typeface="Times New Roman" panose="02020603050405020304" charset="0"/>
-              </a:rPr>
-              <a:t>↓</a:t>
-            </a:r>
-            <a:endParaRPr lang="en-US" altLang="en-US" sz="1800">
-              <a:latin typeface="Times New Roman" panose="02020603050405020304" charset="0"/>
-              <a:cs typeface="Times New Roman" panose="02020603050405020304" charset="0"/>
-            </a:endParaRPr>
-          </a:p>
-          <a:p>
-            <a:pPr marL="0" indent="0">
-              <a:buNone/>
-            </a:pPr>
-            <a:r>
-              <a:rPr lang="en-US" altLang="en-GB" sz="1800">
-                <a:latin typeface="Times New Roman" panose="02020603050405020304" charset="0"/>
-                <a:cs typeface="Times New Roman" panose="02020603050405020304" charset="0"/>
-              </a:rPr>
-              <a:t>Remotive Matcher + Arbeitnow Matcher (parallel)</a:t>
-            </a:r>
-            <a:endParaRPr lang="en-US" altLang="en-GB" sz="1800">
-              <a:latin typeface="Times New Roman" panose="02020603050405020304" charset="0"/>
-              <a:cs typeface="Times New Roman" panose="02020603050405020304" charset="0"/>
-            </a:endParaRPr>
-          </a:p>
-          <a:p>
-            <a:pPr marL="0" indent="0">
-              <a:buNone/>
-            </a:pPr>
-            <a:r>
-              <a:rPr lang="en-US" altLang="en-US" sz="1800">
-                <a:latin typeface="Times New Roman" panose="02020603050405020304" charset="0"/>
-                <a:cs typeface="Times New Roman" panose="02020603050405020304" charset="0"/>
-              </a:rPr>
-              <a:t>↓</a:t>
-            </a:r>
-            <a:endParaRPr lang="en-US" altLang="en-US" sz="1800">
-              <a:latin typeface="Times New Roman" panose="02020603050405020304" charset="0"/>
-              <a:cs typeface="Times New Roman" panose="02020603050405020304" charset="0"/>
-            </a:endParaRPr>
-          </a:p>
-          <a:p>
-            <a:pPr marL="0" indent="0">
-              <a:buNone/>
-            </a:pPr>
-            <a:r>
-              <a:rPr lang="en-US" altLang="en-GB" sz="1800">
-                <a:latin typeface="Times New Roman" panose="02020603050405020304" charset="0"/>
-                <a:cs typeface="Times New Roman" panose="02020603050405020304" charset="0"/>
-              </a:rPr>
-              <a:t>Ranking Agent</a:t>
-            </a:r>
-            <a:endParaRPr lang="en-US" altLang="en-GB" sz="1800">
-              <a:latin typeface="Times New Roman" panose="02020603050405020304" charset="0"/>
-              <a:cs typeface="Times New Roman" panose="02020603050405020304" charset="0"/>
-            </a:endParaRPr>
-          </a:p>
-          <a:p>
-            <a:pPr marL="0" indent="0">
-              <a:buNone/>
-            </a:pPr>
-            <a:r>
-              <a:rPr lang="en-US" altLang="en-US" sz="1800">
-                <a:latin typeface="Times New Roman" panose="02020603050405020304" charset="0"/>
-                <a:cs typeface="Times New Roman" panose="02020603050405020304" charset="0"/>
-              </a:rPr>
-              <a:t>↓</a:t>
-            </a:r>
-            <a:endParaRPr lang="en-US" altLang="en-US" sz="1800">
-              <a:latin typeface="Times New Roman" panose="02020603050405020304" charset="0"/>
-              <a:cs typeface="Times New Roman" panose="02020603050405020304" charset="0"/>
-            </a:endParaRPr>
-          </a:p>
-          <a:p>
-            <a:pPr marL="0" indent="0">
-              <a:buNone/>
-            </a:pPr>
-            <a:r>
-              <a:rPr lang="en-US" altLang="en-GB" sz="1800">
-                <a:latin typeface="Times New Roman" panose="02020603050405020304" charset="0"/>
-                <a:cs typeface="Times New Roman" panose="02020603050405020304" charset="0"/>
-              </a:rPr>
-              <a:t>Aggregator Agent</a:t>
-            </a:r>
-            <a:endParaRPr lang="en-US" altLang="en-GB" sz="1800">
-              <a:latin typeface="Times New Roman" panose="02020603050405020304" charset="0"/>
-              <a:cs typeface="Times New Roman" panose="02020603050405020304" charset="0"/>
-            </a:endParaRPr>
-          </a:p>
-          <a:p>
-            <a:pPr marL="0" indent="0">
-              <a:buNone/>
-            </a:pPr>
-            <a:r>
-              <a:rPr lang="en-US" altLang="en-US" sz="1800">
-                <a:latin typeface="Times New Roman" panose="02020603050405020304" charset="0"/>
-                <a:cs typeface="Times New Roman" panose="02020603050405020304" charset="0"/>
-              </a:rPr>
-              <a:t>↓</a:t>
-            </a:r>
-            <a:endParaRPr lang="en-US" altLang="en-US" sz="1800">
-              <a:latin typeface="Times New Roman" panose="02020603050405020304" charset="0"/>
-              <a:cs typeface="Times New Roman" panose="02020603050405020304" charset="0"/>
-            </a:endParaRPr>
-          </a:p>
-          <a:p>
-            <a:pPr marL="0" indent="0">
-              <a:buNone/>
-            </a:pPr>
-            <a:r>
-              <a:rPr lang="en-US" altLang="en-GB" sz="1800">
-                <a:latin typeface="Times New Roman" panose="02020603050405020304" charset="0"/>
-                <a:cs typeface="Times New Roman" panose="02020603050405020304" charset="0"/>
-              </a:rPr>
-              <a:t>UI (Gradio)</a:t>
-            </a:r>
-            <a:endParaRPr lang="en-US" altLang="en-GB" sz="1800">
-              <a:latin typeface="Times New Roman" panose="02020603050405020304" charset="0"/>
-              <a:cs typeface="Times New Roman" panose="02020603050405020304" charset="0"/>
-            </a:endParaRPr>
-          </a:p>
-          <a:p>
-            <a:pPr marL="0" indent="0">
-              <a:buNone/>
-            </a:pPr>
-            <a:r>
-              <a:rPr lang="en-US" altLang="en-US" sz="1800">
-                <a:latin typeface="Times New Roman" panose="02020603050405020304" charset="0"/>
-                <a:cs typeface="Times New Roman" panose="02020603050405020304" charset="0"/>
-              </a:rPr>
-              <a:t>↓</a:t>
-            </a:r>
-            <a:endParaRPr lang="en-US" altLang="en-US" sz="1800">
-              <a:latin typeface="Times New Roman" panose="02020603050405020304" charset="0"/>
-              <a:cs typeface="Times New Roman" panose="02020603050405020304" charset="0"/>
-            </a:endParaRPr>
-          </a:p>
-          <a:p>
-            <a:pPr marL="0" indent="0">
-              <a:buNone/>
-            </a:pPr>
-            <a:r>
-              <a:rPr lang="en-US" altLang="en-GB" sz="1800">
-                <a:latin typeface="Times New Roman" panose="02020603050405020304" charset="0"/>
-                <a:cs typeface="Times New Roman" panose="02020603050405020304" charset="0"/>
-              </a:rPr>
-              <a:t>Tailored Resume Agent (on demand)</a:t>
-            </a:r>
-            <a:endParaRPr lang="en-US" altLang="en-GB" sz="1800">
-              <a:latin typeface="Times New Roman" panose="02020603050405020304" charset="0"/>
-              <a:cs typeface="Times New Roman" panose="02020603050405020304" charset="0"/>
-            </a:endParaRPr>
-          </a:p>
-        </p:txBody>
-      </p:sp>
+            <a:endParaRPr lang="en-US" altLang="en-GB" sz="1800" b="1">
+              <a:latin typeface="Times New Roman" panose="02020603050405020304" charset="0"/>
+              <a:cs typeface="Times New Roman" panose="02020603050405020304" charset="0"/>
+            </a:endParaRPr>
+          </a:p>
+        </p:txBody>
+      </p:sp>
+      <p:pic>
+        <p:nvPicPr>
+          <p:cNvPr id="4" name="Picture 3" descr="workflow-diagram"/>
+          <p:cNvPicPr>
+            <a:picLocks noChangeAspect="1"/>
+          </p:cNvPicPr>
+          <p:nvPr/>
+        </p:nvPicPr>
+        <p:blipFill>
+          <a:blip r:embed="rId1"/>
+          <a:stretch>
+            <a:fillRect/>
+          </a:stretch>
+        </p:blipFill>
+        <p:spPr>
+          <a:xfrm>
+            <a:off x="3830320" y="885825"/>
+            <a:ext cx="4941570" cy="6013450"/>
+          </a:xfrm>
+          <a:prstGeom prst="rect">
+            <a:avLst/>
+          </a:prstGeom>
+        </p:spPr>
+      </p:pic>
     </p:spTree>
   </p:cSld>
   <p:clrMapOvr>
@@ -6181,7 +7155,12 @@
             <p:ph type="title"/>
           </p:nvPr>
         </p:nvSpPr>
-        <p:spPr/>
+        <p:spPr>
+          <a:xfrm>
+            <a:off x="609600" y="0"/>
+            <a:ext cx="10972800" cy="582613"/>
+          </a:xfrm>
+        </p:spPr>
         <p:txBody>
           <a:bodyPr/>
           <a:p>
@@ -6199,51 +7178,32 @@
           </a:p>
         </p:txBody>
       </p:sp>
-      <p:sp>
-        <p:nvSpPr>
-          <p:cNvPr id="3" name="Content Placeholder 2"/>
-          <p:cNvSpPr>
-            <a:spLocks noGrp="1"/>
-          </p:cNvSpPr>
+      <p:pic>
+        <p:nvPicPr>
+          <p:cNvPr id="4" name="Content Placeholder 3" descr="project-structure"/>
+          <p:cNvPicPr>
+            <a:picLocks noChangeAspect="1"/>
+          </p:cNvPicPr>
           <p:nvPr>
             <p:ph idx="1"/>
           </p:nvPr>
-        </p:nvSpPr>
-        <p:spPr/>
-        <p:txBody>
-          <a:bodyPr/>
-          <a:p>
-            <a:pPr marL="0" indent="0">
-              <a:buNone/>
-            </a:pPr>
-            <a:r>
-              <a:rPr lang="en-GB" altLang="en-US">
-                <a:latin typeface="Times New Roman" panose="02020603050405020304" charset="0"/>
-                <a:cs typeface="Times New Roman" panose="02020603050405020304" charset="0"/>
-              </a:rPr>
-              <a:t>(</a:t>
-            </a:r>
-            <a:r>
-              <a:rPr lang="en-US" altLang="en-GB">
-                <a:latin typeface="Times New Roman" panose="02020603050405020304" charset="0"/>
-                <a:cs typeface="Times New Roman" panose="02020603050405020304" charset="0"/>
-              </a:rPr>
-              <a:t>screenshot of our folder</a:t>
-            </a:r>
-            <a:r>
-              <a:rPr lang="en-GB" altLang="en-US">
-                <a:latin typeface="Times New Roman" panose="02020603050405020304" charset="0"/>
-                <a:cs typeface="Times New Roman" panose="02020603050405020304" charset="0"/>
-              </a:rPr>
-              <a:t>)</a:t>
-            </a:r>
-            <a:endParaRPr lang="en-GB" altLang="en-US">
-              <a:latin typeface="Times New Roman" panose="02020603050405020304" charset="0"/>
-              <a:cs typeface="Times New Roman" panose="02020603050405020304" charset="0"/>
-            </a:endParaRPr>
-          </a:p>
-        </p:txBody>
-      </p:sp>
+        </p:nvPicPr>
+        <p:blipFill>
+          <a:blip r:embed="rId1"/>
+          <a:stretch>
+            <a:fillRect/>
+          </a:stretch>
+        </p:blipFill>
+        <p:spPr>
+          <a:xfrm>
+            <a:off x="1243965" y="621030"/>
+            <a:ext cx="9708515" cy="6137910"/>
+          </a:xfrm>
+          <a:prstGeom prst="rect">
+            <a:avLst/>
+          </a:prstGeom>
+        </p:spPr>
+      </p:pic>
     </p:spTree>
   </p:cSld>
   <p:clrMapOvr>
@@ -6272,7 +7232,12 @@
             <p:ph type="title"/>
           </p:nvPr>
         </p:nvSpPr>
-        <p:spPr/>
+        <p:spPr>
+          <a:xfrm>
+            <a:off x="609600" y="102235"/>
+            <a:ext cx="10972800" cy="582930"/>
+          </a:xfrm>
+        </p:spPr>
         <p:txBody>
           <a:bodyPr/>
           <a:p>
@@ -6301,7 +7266,12 @@
             <p:ph idx="1"/>
           </p:nvPr>
         </p:nvSpPr>
-        <p:spPr/>
+        <p:spPr>
+          <a:xfrm>
+            <a:off x="609600" y="684530"/>
+            <a:ext cx="10972800" cy="6073775"/>
+          </a:xfrm>
+        </p:spPr>
         <p:txBody>
           <a:bodyPr/>
           <a:p>
@@ -6322,11 +7292,11 @@
           </a:p>
           <a:p>
             <a:r>
-              <a:rPr lang="en-US" altLang="en-GB">
-                <a:latin typeface="Times New Roman" panose="02020603050405020304" charset="0"/>
-                <a:cs typeface="Times New Roman" panose="02020603050405020304" charset="0"/>
-              </a:rPr>
-              <a:t>agents/ </a:t>
+              <a:rPr lang="en-US" altLang="en-GB" b="1">
+                <a:latin typeface="Times New Roman" panose="02020603050405020304" charset="0"/>
+                <a:cs typeface="Times New Roman" panose="02020603050405020304" charset="0"/>
+              </a:rPr>
+              <a:t>career_agents/ </a:t>
             </a:r>
             <a:r>
               <a:rPr lang="en-US" altLang="en-US">
@@ -6340,20 +7310,50 @@
                 <a:latin typeface="Times New Roman" panose="02020603050405020304" charset="0"/>
                 <a:cs typeface="Times New Roman" panose="02020603050405020304" charset="0"/>
               </a:rPr>
-              <a:t> Core AI agents (parser, matcher, ranking, aggregator, resume generator)</a:t>
-            </a:r>
-            <a:endParaRPr lang="en-US" altLang="en-GB">
-              <a:latin typeface="Times New Roman" panose="02020603050405020304" charset="0"/>
-              <a:cs typeface="Times New Roman" panose="02020603050405020304" charset="0"/>
-            </a:endParaRPr>
-          </a:p>
-          <a:p>
-            <a:r>
-              <a:rPr lang="en-US" altLang="en-GB">
-                <a:latin typeface="Times New Roman" panose="02020603050405020304" charset="0"/>
-                <a:cs typeface="Times New Roman" panose="02020603050405020304" charset="0"/>
-              </a:rPr>
-              <a:t>apis/ </a:t>
+              <a:t> Core AI agents (parser, remotive_matcher, </a:t>
+            </a:r>
+            <a:r>
+              <a:rPr lang="en-US" altLang="en-GB">
+                <a:latin typeface="Times New Roman" panose="02020603050405020304" charset="0"/>
+                <a:cs typeface="Times New Roman" panose="02020603050405020304" charset="0"/>
+                <a:sym typeface="+mn-ea"/>
+              </a:rPr>
+              <a:t>arbeitnow</a:t>
+            </a:r>
+            <a:r>
+              <a:rPr lang="en-US" altLang="en-GB">
+                <a:latin typeface="Times New Roman" panose="02020603050405020304" charset="0"/>
+                <a:cs typeface="Times New Roman" panose="02020603050405020304" charset="0"/>
+                <a:sym typeface="+mn-ea"/>
+              </a:rPr>
+              <a:t>_matcher</a:t>
+            </a:r>
+            <a:r>
+              <a:rPr lang="en-US" altLang="en-GB">
+                <a:latin typeface="Times New Roman" panose="02020603050405020304" charset="0"/>
+                <a:cs typeface="Times New Roman" panose="02020603050405020304" charset="0"/>
+              </a:rPr>
+              <a:t>, aggregator, resume generator)</a:t>
+            </a:r>
+            <a:endParaRPr lang="en-US" altLang="en-GB">
+              <a:latin typeface="Times New Roman" panose="02020603050405020304" charset="0"/>
+              <a:cs typeface="Times New Roman" panose="02020603050405020304" charset="0"/>
+            </a:endParaRPr>
+          </a:p>
+          <a:p>
+            <a:r>
+              <a:rPr lang="en-US" altLang="en-GB" b="1">
+                <a:latin typeface="Times New Roman" panose="02020603050405020304" charset="0"/>
+                <a:cs typeface="Times New Roman" panose="02020603050405020304" charset="0"/>
+              </a:rPr>
+              <a:t>agent_tools/</a:t>
+            </a:r>
+            <a:r>
+              <a:rPr lang="en-US" altLang="en-GB">
+                <a:latin typeface="Times New Roman" panose="02020603050405020304" charset="0"/>
+                <a:cs typeface="Times New Roman" panose="02020603050405020304" charset="0"/>
+              </a:rPr>
+              <a:t> </a:t>
             </a:r>
             <a:r>
               <a:rPr lang="en-US" altLang="en-US">
@@ -6367,20 +7367,27 @@
                 <a:latin typeface="Times New Roman" panose="02020603050405020304" charset="0"/>
                 <a:cs typeface="Times New Roman" panose="02020603050405020304" charset="0"/>
               </a:rPr>
-              <a:t> External job API integrations</a:t>
-            </a:r>
-            <a:endParaRPr lang="en-US" altLang="en-GB">
-              <a:latin typeface="Times New Roman" panose="02020603050405020304" charset="0"/>
-              <a:cs typeface="Times New Roman" panose="02020603050405020304" charset="0"/>
-            </a:endParaRPr>
-          </a:p>
-          <a:p>
-            <a:r>
-              <a:rPr lang="en-US" altLang="en-GB">
-                <a:latin typeface="Times New Roman" panose="02020603050405020304" charset="0"/>
-                <a:cs typeface="Times New Roman" panose="02020603050405020304" charset="0"/>
-              </a:rPr>
-              <a:t>utils/ </a:t>
+              <a:t> Contains Function tools </a:t>
+            </a:r>
+            <a:endParaRPr lang="en-US" altLang="en-GB">
+              <a:latin typeface="Times New Roman" panose="02020603050405020304" charset="0"/>
+              <a:cs typeface="Times New Roman" panose="02020603050405020304" charset="0"/>
+            </a:endParaRPr>
+          </a:p>
+          <a:p>
+            <a:r>
+              <a:rPr lang="en-US" altLang="en-GB" b="1">
+                <a:latin typeface="Times New Roman" panose="02020603050405020304" charset="0"/>
+                <a:cs typeface="Times New Roman" panose="02020603050405020304" charset="0"/>
+              </a:rPr>
+              <a:t>utils/</a:t>
+            </a:r>
+            <a:r>
+              <a:rPr lang="en-US" altLang="en-GB">
+                <a:latin typeface="Times New Roman" panose="02020603050405020304" charset="0"/>
+                <a:cs typeface="Times New Roman" panose="02020603050405020304" charset="0"/>
+              </a:rPr>
+              <a:t> </a:t>
             </a:r>
             <a:r>
               <a:rPr lang="en-US" altLang="en-US">
@@ -6394,16 +7401,44 @@
                 <a:latin typeface="Times New Roman" panose="02020603050405020304" charset="0"/>
                 <a:cs typeface="Times New Roman" panose="02020603050405020304" charset="0"/>
               </a:rPr>
-              <a:t> Helper functions (PDF parsing, scoring)</a:t>
-            </a:r>
-            <a:endParaRPr lang="en-US" altLang="en-GB">
-              <a:latin typeface="Times New Roman" panose="02020603050405020304" charset="0"/>
-              <a:cs typeface="Times New Roman" panose="02020603050405020304" charset="0"/>
-            </a:endParaRPr>
-          </a:p>
-          <a:p>
-            <a:r>
-              <a:rPr lang="en-US" altLang="en-GB">
+              <a:t> Helper functions (PDF parsing, scoring, etc)</a:t>
+            </a:r>
+            <a:endParaRPr lang="en-US" altLang="en-GB">
+              <a:latin typeface="Times New Roman" panose="02020603050405020304" charset="0"/>
+              <a:cs typeface="Times New Roman" panose="02020603050405020304" charset="0"/>
+            </a:endParaRPr>
+          </a:p>
+          <a:p>
+            <a:r>
+              <a:rPr lang="en-US" altLang="en-GB" b="1">
+                <a:latin typeface="Times New Roman" panose="02020603050405020304" charset="0"/>
+                <a:cs typeface="Times New Roman" panose="02020603050405020304" charset="0"/>
+              </a:rPr>
+              <a:t>scripts/</a:t>
+            </a:r>
+            <a:r>
+              <a:rPr lang="en-US" altLang="en-GB">
+                <a:latin typeface="Times New Roman" panose="02020603050405020304" charset="0"/>
+                <a:cs typeface="Times New Roman" panose="02020603050405020304" charset="0"/>
+              </a:rPr>
+              <a:t> </a:t>
+            </a:r>
+            <a:r>
+              <a:rPr lang="en-US" altLang="en-US">
+                <a:latin typeface="Times New Roman" panose="02020603050405020304" charset="0"/>
+                <a:cs typeface="Times New Roman" panose="02020603050405020304" charset="0"/>
+                <a:sym typeface="+mn-ea"/>
+              </a:rPr>
+              <a:t>→ pdf generation script etc</a:t>
+            </a:r>
+            <a:endParaRPr lang="en-US" altLang="en-GB">
+              <a:latin typeface="Times New Roman" panose="02020603050405020304" charset="0"/>
+              <a:cs typeface="Times New Roman" panose="02020603050405020304" charset="0"/>
+            </a:endParaRPr>
+          </a:p>
+          <a:p>
+            <a:r>
+              <a:rPr lang="en-US" altLang="en-GB" b="1">
                 <a:latin typeface="Times New Roman" panose="02020603050405020304" charset="0"/>
                 <a:cs typeface="Times New Roman" panose="02020603050405020304" charset="0"/>
               </a:rPr>
@@ -6430,11 +7465,18 @@
           </a:p>
           <a:p>
             <a:r>
-              <a:rPr lang="en-US" altLang="en-GB">
-                <a:latin typeface="Times New Roman" panose="02020603050405020304" charset="0"/>
-                <a:cs typeface="Times New Roman" panose="02020603050405020304" charset="0"/>
-              </a:rPr>
-              <a:t>main.py </a:t>
+              <a:rPr lang="en-US" altLang="en-GB" b="1">
+                <a:latin typeface="Times New Roman" panose="02020603050405020304" charset="0"/>
+                <a:cs typeface="Times New Roman" panose="02020603050405020304" charset="0"/>
+              </a:rPr>
+              <a:t>main.py</a:t>
+            </a:r>
+            <a:r>
+              <a:rPr lang="en-US" altLang="en-GB">
+                <a:latin typeface="Times New Roman" panose="02020603050405020304" charset="0"/>
+                <a:cs typeface="Times New Roman" panose="02020603050405020304" charset="0"/>
+              </a:rPr>
+              <a:t> </a:t>
             </a:r>
             <a:r>
               <a:rPr lang="en-US" altLang="en-US">
@@ -6457,18 +7499,18 @@
           </a:p>
           <a:p>
             <a:r>
-              <a:rPr lang="en-GB" altLang="en-US">
-                <a:latin typeface="Times New Roman" panose="02020603050405020304" charset="0"/>
-                <a:cs typeface="Times New Roman" panose="02020603050405020304" charset="0"/>
-              </a:rPr>
-              <a:t>pipeline</a:t>
-            </a:r>
-            <a:r>
-              <a:rPr lang="en-US" altLang="en-GB">
-                <a:latin typeface="Times New Roman" panose="02020603050405020304" charset="0"/>
-                <a:cs typeface="Times New Roman" panose="02020603050405020304" charset="0"/>
-              </a:rPr>
-              <a:t>.py </a:t>
+              <a:rPr lang="en-US" altLang="en-GB" b="1">
+                <a:latin typeface="Times New Roman" panose="02020603050405020304" charset="0"/>
+                <a:cs typeface="Times New Roman" panose="02020603050405020304" charset="0"/>
+              </a:rPr>
+              <a:t>career_agents/orchestrator.py</a:t>
+            </a:r>
+            <a:r>
+              <a:rPr lang="en-US" altLang="en-GB">
+                <a:latin typeface="Times New Roman" panose="02020603050405020304" charset="0"/>
+                <a:cs typeface="Times New Roman" panose="02020603050405020304" charset="0"/>
+              </a:rPr>
+              <a:t> </a:t>
             </a:r>
             <a:r>
               <a:rPr lang="en-US" altLang="en-US">
@@ -6482,7 +7524,37 @@
                 <a:latin typeface="Times New Roman" panose="02020603050405020304" charset="0"/>
                 <a:cs typeface="Times New Roman" panose="02020603050405020304" charset="0"/>
               </a:rPr>
-              <a:t> Controls workflow</a:t>
+              <a:t> Controls Deterministic workflow</a:t>
+            </a:r>
+            <a:endParaRPr lang="en-US" altLang="en-GB">
+              <a:latin typeface="Times New Roman" panose="02020603050405020304" charset="0"/>
+              <a:cs typeface="Times New Roman" panose="02020603050405020304" charset="0"/>
+            </a:endParaRPr>
+          </a:p>
+          <a:p>
+            <a:r>
+              <a:rPr lang="en-US" altLang="en-GB" b="1">
+                <a:latin typeface="Times New Roman" panose="02020603050405020304" charset="0"/>
+                <a:cs typeface="Times New Roman" panose="02020603050405020304" charset="0"/>
+                <a:sym typeface="+mn-ea"/>
+              </a:rPr>
+              <a:t>docs/</a:t>
+            </a:r>
+            <a:r>
+              <a:rPr lang="en-US" altLang="en-GB">
+                <a:latin typeface="Times New Roman" panose="02020603050405020304" charset="0"/>
+                <a:cs typeface="Times New Roman" panose="02020603050405020304" charset="0"/>
+                <a:sym typeface="+mn-ea"/>
+              </a:rPr>
+              <a:t> </a:t>
+            </a:r>
+            <a:r>
+              <a:rPr lang="en-US" altLang="en-US">
+                <a:latin typeface="Times New Roman" panose="02020603050405020304" charset="0"/>
+                <a:cs typeface="Times New Roman" panose="02020603050405020304" charset="0"/>
+                <a:sym typeface="+mn-ea"/>
+              </a:rPr>
+              <a:t>→ docs</a:t>
             </a:r>
             <a:endParaRPr lang="en-US" altLang="en-GB">
               <a:latin typeface="Times New Roman" panose="02020603050405020304" charset="0"/>
